--- a/exports/pptx/lessons/senior-module-03-ayurveda-good-health/day-01-hook.pptx
+++ b/exports/pptx/lessons/senior-module-03-ayurveda-good-health/day-01-hook.pptx
@@ -14,9 +14,15 @@
     <p:sldId id="262" r:id="rId8"/>
     <p:sldId id="263" r:id="rId9"/>
     <p:sldId id="264" r:id="rId10"/>
+    <p:sldId id="265" r:id="rId11"/>
+    <p:sldId id="266" r:id="rId12"/>
+    <p:sldId id="267" r:id="rId13"/>
+    <p:sldId id="268" r:id="rId14"/>
+    <p:sldId id="269" r:id="rId15"/>
+    <p:sldId id="270" r:id="rId16"/>
   </p:sldIdLst>
   <p:notesMasterIdLst>
-    <p:notesMasterId r:id="rId11"/>
+    <p:notesMasterId r:id="rId17"/>
   </p:notesMasterIdLst>
   <p:sldSz cx="9144000" cy="5143500"/>
   <p:notesSz cx="5143500" cy="9144000"/>
@@ -534,6 +540,534 @@
             <a:fld id="{F7021451-1387-4CA6-816F-3879F97B5CBC}" type="slidenum">
               <a:rPr lang="en-US"/>
               <a:t>1</a:t>
+            </a:fld>
+            <a:endParaRPr lang="en-US"/>
+          </a:p>
+        </p:txBody>
+      </p:sp>
+    </p:spTree>
+    <p:extLst>
+      <p:ext uri="{BB962C8B-B14F-4D97-AF65-F5344CB8AC3E}">
+        <p14:creationId xmlns:p14="http://schemas.microsoft.com/office/powerpoint/2010/main" val="1024086991"/>
+      </p:ext>
+    </p:extLst>
+  </p:cSld>
+  <p:clrMapOvr>
+    <a:masterClrMapping/>
+  </p:clrMapOvr>
+</p:notes>
+</file>
+
+<file path=ppt/notesSlides/notesSlide10.xml><?xml version="1.0" encoding="utf-8"?>
+<p:notes xmlns:a="http://schemas.openxmlformats.org/drawingml/2006/main" xmlns:r="http://schemas.openxmlformats.org/officeDocument/2006/relationships" xmlns:p="http://schemas.openxmlformats.org/presentationml/2006/main">
+  <p:cSld>
+    <p:spTree>
+      <p:nvGrpSpPr>
+        <p:cNvPr id="1" name=""/>
+        <p:cNvGrpSpPr/>
+        <p:nvPr/>
+      </p:nvGrpSpPr>
+      <p:grpSpPr>
+        <a:xfrm>
+          <a:off x="0" y="0"/>
+          <a:ext cx="0" cy="0"/>
+          <a:chOff x="0" y="0"/>
+          <a:chExt cx="0" cy="0"/>
+        </a:xfrm>
+      </p:grpSpPr>
+      <p:sp>
+        <p:nvSpPr>
+          <p:cNvPr id="2" name="Slide Image Placeholder 1"/>
+          <p:cNvSpPr>
+            <a:spLocks noGrp="1" noRot="1" noChangeAspect="1"/>
+          </p:cNvSpPr>
+          <p:nvPr>
+            <p:ph type="sldImg"/>
+          </p:nvPr>
+        </p:nvSpPr>
+        <p:spPr/>
+      </p:sp>
+      <p:sp>
+        <p:nvSpPr>
+          <p:cNvPr id="3" name="Notes Placeholder 2"/>
+          <p:cNvSpPr>
+            <a:spLocks noGrp="1"/>
+          </p:cNvSpPr>
+          <p:nvPr>
+            <p:ph type="body" idx="1"/>
+          </p:nvPr>
+        </p:nvSpPr>
+        <p:spPr/>
+        <p:txBody>
+          <a:bodyPr/>
+          <a:lstStyle/>
+          <a:p>
+            <a:r>
+              <a:rPr lang="en-US" dirty="0"/>
+              <a:t/>
+            </a:r>
+            <a:endParaRPr lang="en-US" dirty="0"/>
+          </a:p>
+        </p:txBody>
+      </p:sp>
+      <p:sp>
+        <p:nvSpPr>
+          <p:cNvPr id="4" name="Slide Number Placeholder 3"/>
+          <p:cNvSpPr>
+            <a:spLocks noGrp="1"/>
+          </p:cNvSpPr>
+          <p:nvPr>
+            <p:ph type="sldNum" sz="quarter" idx="10"/>
+          </p:nvPr>
+        </p:nvSpPr>
+        <p:spPr/>
+        <p:txBody>
+          <a:bodyPr/>
+          <a:lstStyle/>
+          <a:p>
+            <a:fld id="{F7021451-1387-4CA6-816F-3879F97B5CBC}" type="slidenum">
+              <a:rPr lang="en-US"/>
+              <a:t>10</a:t>
+            </a:fld>
+            <a:endParaRPr lang="en-US"/>
+          </a:p>
+        </p:txBody>
+      </p:sp>
+    </p:spTree>
+    <p:extLst>
+      <p:ext uri="{BB962C8B-B14F-4D97-AF65-F5344CB8AC3E}">
+        <p14:creationId xmlns:p14="http://schemas.microsoft.com/office/powerpoint/2010/main" val="1024086991"/>
+      </p:ext>
+    </p:extLst>
+  </p:cSld>
+  <p:clrMapOvr>
+    <a:masterClrMapping/>
+  </p:clrMapOvr>
+</p:notes>
+</file>
+
+<file path=ppt/notesSlides/notesSlide11.xml><?xml version="1.0" encoding="utf-8"?>
+<p:notes xmlns:a="http://schemas.openxmlformats.org/drawingml/2006/main" xmlns:r="http://schemas.openxmlformats.org/officeDocument/2006/relationships" xmlns:p="http://schemas.openxmlformats.org/presentationml/2006/main">
+  <p:cSld>
+    <p:spTree>
+      <p:nvGrpSpPr>
+        <p:cNvPr id="1" name=""/>
+        <p:cNvGrpSpPr/>
+        <p:nvPr/>
+      </p:nvGrpSpPr>
+      <p:grpSpPr>
+        <a:xfrm>
+          <a:off x="0" y="0"/>
+          <a:ext cx="0" cy="0"/>
+          <a:chOff x="0" y="0"/>
+          <a:chExt cx="0" cy="0"/>
+        </a:xfrm>
+      </p:grpSpPr>
+      <p:sp>
+        <p:nvSpPr>
+          <p:cNvPr id="2" name="Slide Image Placeholder 1"/>
+          <p:cNvSpPr>
+            <a:spLocks noGrp="1" noRot="1" noChangeAspect="1"/>
+          </p:cNvSpPr>
+          <p:nvPr>
+            <p:ph type="sldImg"/>
+          </p:nvPr>
+        </p:nvSpPr>
+        <p:spPr/>
+      </p:sp>
+      <p:sp>
+        <p:nvSpPr>
+          <p:cNvPr id="3" name="Notes Placeholder 2"/>
+          <p:cNvSpPr>
+            <a:spLocks noGrp="1"/>
+          </p:cNvSpPr>
+          <p:nvPr>
+            <p:ph type="body" idx="1"/>
+          </p:nvPr>
+        </p:nvSpPr>
+        <p:spPr/>
+        <p:txBody>
+          <a:bodyPr/>
+          <a:lstStyle/>
+          <a:p>
+            <a:r>
+              <a:rPr lang="en-US" dirty="0"/>
+              <a:t/>
+            </a:r>
+            <a:endParaRPr lang="en-US" dirty="0"/>
+          </a:p>
+        </p:txBody>
+      </p:sp>
+      <p:sp>
+        <p:nvSpPr>
+          <p:cNvPr id="4" name="Slide Number Placeholder 3"/>
+          <p:cNvSpPr>
+            <a:spLocks noGrp="1"/>
+          </p:cNvSpPr>
+          <p:nvPr>
+            <p:ph type="sldNum" sz="quarter" idx="10"/>
+          </p:nvPr>
+        </p:nvSpPr>
+        <p:spPr/>
+        <p:txBody>
+          <a:bodyPr/>
+          <a:lstStyle/>
+          <a:p>
+            <a:fld id="{F7021451-1387-4CA6-816F-3879F97B5CBC}" type="slidenum">
+              <a:rPr lang="en-US"/>
+              <a:t>11</a:t>
+            </a:fld>
+            <a:endParaRPr lang="en-US"/>
+          </a:p>
+        </p:txBody>
+      </p:sp>
+    </p:spTree>
+    <p:extLst>
+      <p:ext uri="{BB962C8B-B14F-4D97-AF65-F5344CB8AC3E}">
+        <p14:creationId xmlns:p14="http://schemas.microsoft.com/office/powerpoint/2010/main" val="1024086991"/>
+      </p:ext>
+    </p:extLst>
+  </p:cSld>
+  <p:clrMapOvr>
+    <a:masterClrMapping/>
+  </p:clrMapOvr>
+</p:notes>
+</file>
+
+<file path=ppt/notesSlides/notesSlide12.xml><?xml version="1.0" encoding="utf-8"?>
+<p:notes xmlns:a="http://schemas.openxmlformats.org/drawingml/2006/main" xmlns:r="http://schemas.openxmlformats.org/officeDocument/2006/relationships" xmlns:p="http://schemas.openxmlformats.org/presentationml/2006/main">
+  <p:cSld>
+    <p:spTree>
+      <p:nvGrpSpPr>
+        <p:cNvPr id="1" name=""/>
+        <p:cNvGrpSpPr/>
+        <p:nvPr/>
+      </p:nvGrpSpPr>
+      <p:grpSpPr>
+        <a:xfrm>
+          <a:off x="0" y="0"/>
+          <a:ext cx="0" cy="0"/>
+          <a:chOff x="0" y="0"/>
+          <a:chExt cx="0" cy="0"/>
+        </a:xfrm>
+      </p:grpSpPr>
+      <p:sp>
+        <p:nvSpPr>
+          <p:cNvPr id="2" name="Slide Image Placeholder 1"/>
+          <p:cNvSpPr>
+            <a:spLocks noGrp="1" noRot="1" noChangeAspect="1"/>
+          </p:cNvSpPr>
+          <p:nvPr>
+            <p:ph type="sldImg"/>
+          </p:nvPr>
+        </p:nvSpPr>
+        <p:spPr/>
+      </p:sp>
+      <p:sp>
+        <p:nvSpPr>
+          <p:cNvPr id="3" name="Notes Placeholder 2"/>
+          <p:cNvSpPr>
+            <a:spLocks noGrp="1"/>
+          </p:cNvSpPr>
+          <p:nvPr>
+            <p:ph type="body" idx="1"/>
+          </p:nvPr>
+        </p:nvSpPr>
+        <p:spPr/>
+        <p:txBody>
+          <a:bodyPr/>
+          <a:lstStyle/>
+          <a:p>
+            <a:r>
+              <a:rPr lang="en-US" dirty="0"/>
+              <a:t/>
+            </a:r>
+            <a:endParaRPr lang="en-US" dirty="0"/>
+          </a:p>
+        </p:txBody>
+      </p:sp>
+      <p:sp>
+        <p:nvSpPr>
+          <p:cNvPr id="4" name="Slide Number Placeholder 3"/>
+          <p:cNvSpPr>
+            <a:spLocks noGrp="1"/>
+          </p:cNvSpPr>
+          <p:nvPr>
+            <p:ph type="sldNum" sz="quarter" idx="10"/>
+          </p:nvPr>
+        </p:nvSpPr>
+        <p:spPr/>
+        <p:txBody>
+          <a:bodyPr/>
+          <a:lstStyle/>
+          <a:p>
+            <a:fld id="{F7021451-1387-4CA6-816F-3879F97B5CBC}" type="slidenum">
+              <a:rPr lang="en-US"/>
+              <a:t>12</a:t>
+            </a:fld>
+            <a:endParaRPr lang="en-US"/>
+          </a:p>
+        </p:txBody>
+      </p:sp>
+    </p:spTree>
+    <p:extLst>
+      <p:ext uri="{BB962C8B-B14F-4D97-AF65-F5344CB8AC3E}">
+        <p14:creationId xmlns:p14="http://schemas.microsoft.com/office/powerpoint/2010/main" val="1024086991"/>
+      </p:ext>
+    </p:extLst>
+  </p:cSld>
+  <p:clrMapOvr>
+    <a:masterClrMapping/>
+  </p:clrMapOvr>
+</p:notes>
+</file>
+
+<file path=ppt/notesSlides/notesSlide13.xml><?xml version="1.0" encoding="utf-8"?>
+<p:notes xmlns:a="http://schemas.openxmlformats.org/drawingml/2006/main" xmlns:r="http://schemas.openxmlformats.org/officeDocument/2006/relationships" xmlns:p="http://schemas.openxmlformats.org/presentationml/2006/main">
+  <p:cSld>
+    <p:spTree>
+      <p:nvGrpSpPr>
+        <p:cNvPr id="1" name=""/>
+        <p:cNvGrpSpPr/>
+        <p:nvPr/>
+      </p:nvGrpSpPr>
+      <p:grpSpPr>
+        <a:xfrm>
+          <a:off x="0" y="0"/>
+          <a:ext cx="0" cy="0"/>
+          <a:chOff x="0" y="0"/>
+          <a:chExt cx="0" cy="0"/>
+        </a:xfrm>
+      </p:grpSpPr>
+      <p:sp>
+        <p:nvSpPr>
+          <p:cNvPr id="2" name="Slide Image Placeholder 1"/>
+          <p:cNvSpPr>
+            <a:spLocks noGrp="1" noRot="1" noChangeAspect="1"/>
+          </p:cNvSpPr>
+          <p:nvPr>
+            <p:ph type="sldImg"/>
+          </p:nvPr>
+        </p:nvSpPr>
+        <p:spPr/>
+      </p:sp>
+      <p:sp>
+        <p:nvSpPr>
+          <p:cNvPr id="3" name="Notes Placeholder 2"/>
+          <p:cNvSpPr>
+            <a:spLocks noGrp="1"/>
+          </p:cNvSpPr>
+          <p:nvPr>
+            <p:ph type="body" idx="1"/>
+          </p:nvPr>
+        </p:nvSpPr>
+        <p:spPr/>
+        <p:txBody>
+          <a:bodyPr/>
+          <a:lstStyle/>
+          <a:p>
+            <a:r>
+              <a:rPr lang="en-US" dirty="0"/>
+              <a:t/>
+            </a:r>
+            <a:endParaRPr lang="en-US" dirty="0"/>
+          </a:p>
+        </p:txBody>
+      </p:sp>
+      <p:sp>
+        <p:nvSpPr>
+          <p:cNvPr id="4" name="Slide Number Placeholder 3"/>
+          <p:cNvSpPr>
+            <a:spLocks noGrp="1"/>
+          </p:cNvSpPr>
+          <p:nvPr>
+            <p:ph type="sldNum" sz="quarter" idx="10"/>
+          </p:nvPr>
+        </p:nvSpPr>
+        <p:spPr/>
+        <p:txBody>
+          <a:bodyPr/>
+          <a:lstStyle/>
+          <a:p>
+            <a:fld id="{F7021451-1387-4CA6-816F-3879F97B5CBC}" type="slidenum">
+              <a:rPr lang="en-US"/>
+              <a:t>13</a:t>
+            </a:fld>
+            <a:endParaRPr lang="en-US"/>
+          </a:p>
+        </p:txBody>
+      </p:sp>
+    </p:spTree>
+    <p:extLst>
+      <p:ext uri="{BB962C8B-B14F-4D97-AF65-F5344CB8AC3E}">
+        <p14:creationId xmlns:p14="http://schemas.microsoft.com/office/powerpoint/2010/main" val="1024086991"/>
+      </p:ext>
+    </p:extLst>
+  </p:cSld>
+  <p:clrMapOvr>
+    <a:masterClrMapping/>
+  </p:clrMapOvr>
+</p:notes>
+</file>
+
+<file path=ppt/notesSlides/notesSlide14.xml><?xml version="1.0" encoding="utf-8"?>
+<p:notes xmlns:a="http://schemas.openxmlformats.org/drawingml/2006/main" xmlns:r="http://schemas.openxmlformats.org/officeDocument/2006/relationships" xmlns:p="http://schemas.openxmlformats.org/presentationml/2006/main">
+  <p:cSld>
+    <p:spTree>
+      <p:nvGrpSpPr>
+        <p:cNvPr id="1" name=""/>
+        <p:cNvGrpSpPr/>
+        <p:nvPr/>
+      </p:nvGrpSpPr>
+      <p:grpSpPr>
+        <a:xfrm>
+          <a:off x="0" y="0"/>
+          <a:ext cx="0" cy="0"/>
+          <a:chOff x="0" y="0"/>
+          <a:chExt cx="0" cy="0"/>
+        </a:xfrm>
+      </p:grpSpPr>
+      <p:sp>
+        <p:nvSpPr>
+          <p:cNvPr id="2" name="Slide Image Placeholder 1"/>
+          <p:cNvSpPr>
+            <a:spLocks noGrp="1" noRot="1" noChangeAspect="1"/>
+          </p:cNvSpPr>
+          <p:nvPr>
+            <p:ph type="sldImg"/>
+          </p:nvPr>
+        </p:nvSpPr>
+        <p:spPr/>
+      </p:sp>
+      <p:sp>
+        <p:nvSpPr>
+          <p:cNvPr id="3" name="Notes Placeholder 2"/>
+          <p:cNvSpPr>
+            <a:spLocks noGrp="1"/>
+          </p:cNvSpPr>
+          <p:nvPr>
+            <p:ph type="body" idx="1"/>
+          </p:nvPr>
+        </p:nvSpPr>
+        <p:spPr/>
+        <p:txBody>
+          <a:bodyPr/>
+          <a:lstStyle/>
+          <a:p>
+            <a:r>
+              <a:rPr lang="en-US" dirty="0"/>
+              <a:t/>
+            </a:r>
+            <a:endParaRPr lang="en-US" dirty="0"/>
+          </a:p>
+        </p:txBody>
+      </p:sp>
+      <p:sp>
+        <p:nvSpPr>
+          <p:cNvPr id="4" name="Slide Number Placeholder 3"/>
+          <p:cNvSpPr>
+            <a:spLocks noGrp="1"/>
+          </p:cNvSpPr>
+          <p:nvPr>
+            <p:ph type="sldNum" sz="quarter" idx="10"/>
+          </p:nvPr>
+        </p:nvSpPr>
+        <p:spPr/>
+        <p:txBody>
+          <a:bodyPr/>
+          <a:lstStyle/>
+          <a:p>
+            <a:fld id="{F7021451-1387-4CA6-816F-3879F97B5CBC}" type="slidenum">
+              <a:rPr lang="en-US"/>
+              <a:t>14</a:t>
+            </a:fld>
+            <a:endParaRPr lang="en-US"/>
+          </a:p>
+        </p:txBody>
+      </p:sp>
+    </p:spTree>
+    <p:extLst>
+      <p:ext uri="{BB962C8B-B14F-4D97-AF65-F5344CB8AC3E}">
+        <p14:creationId xmlns:p14="http://schemas.microsoft.com/office/powerpoint/2010/main" val="1024086991"/>
+      </p:ext>
+    </p:extLst>
+  </p:cSld>
+  <p:clrMapOvr>
+    <a:masterClrMapping/>
+  </p:clrMapOvr>
+</p:notes>
+</file>
+
+<file path=ppt/notesSlides/notesSlide15.xml><?xml version="1.0" encoding="utf-8"?>
+<p:notes xmlns:a="http://schemas.openxmlformats.org/drawingml/2006/main" xmlns:r="http://schemas.openxmlformats.org/officeDocument/2006/relationships" xmlns:p="http://schemas.openxmlformats.org/presentationml/2006/main">
+  <p:cSld>
+    <p:spTree>
+      <p:nvGrpSpPr>
+        <p:cNvPr id="1" name=""/>
+        <p:cNvGrpSpPr/>
+        <p:nvPr/>
+      </p:nvGrpSpPr>
+      <p:grpSpPr>
+        <a:xfrm>
+          <a:off x="0" y="0"/>
+          <a:ext cx="0" cy="0"/>
+          <a:chOff x="0" y="0"/>
+          <a:chExt cx="0" cy="0"/>
+        </a:xfrm>
+      </p:grpSpPr>
+      <p:sp>
+        <p:nvSpPr>
+          <p:cNvPr id="2" name="Slide Image Placeholder 1"/>
+          <p:cNvSpPr>
+            <a:spLocks noGrp="1" noRot="1" noChangeAspect="1"/>
+          </p:cNvSpPr>
+          <p:nvPr>
+            <p:ph type="sldImg"/>
+          </p:nvPr>
+        </p:nvSpPr>
+        <p:spPr/>
+      </p:sp>
+      <p:sp>
+        <p:nvSpPr>
+          <p:cNvPr id="3" name="Notes Placeholder 2"/>
+          <p:cNvSpPr>
+            <a:spLocks noGrp="1"/>
+          </p:cNvSpPr>
+          <p:nvPr>
+            <p:ph type="body" idx="1"/>
+          </p:nvPr>
+        </p:nvSpPr>
+        <p:spPr/>
+        <p:txBody>
+          <a:bodyPr/>
+          <a:lstStyle/>
+          <a:p>
+            <a:r>
+              <a:rPr lang="en-US" dirty="0"/>
+              <a:t/>
+            </a:r>
+            <a:endParaRPr lang="en-US" dirty="0"/>
+          </a:p>
+        </p:txBody>
+      </p:sp>
+      <p:sp>
+        <p:nvSpPr>
+          <p:cNvPr id="4" name="Slide Number Placeholder 3"/>
+          <p:cNvSpPr>
+            <a:spLocks noGrp="1"/>
+          </p:cNvSpPr>
+          <p:nvPr>
+            <p:ph type="sldNum" sz="quarter" idx="10"/>
+          </p:nvPr>
+        </p:nvSpPr>
+        <p:spPr/>
+        <p:txBody>
+          <a:bodyPr/>
+          <a:lstStyle/>
+          <a:p>
+            <a:fld id="{F7021451-1387-4CA6-816F-3879F97B5CBC}" type="slidenum">
+              <a:rPr lang="en-US"/>
+              <a:t>15</a:t>
             </a:fld>
             <a:endParaRPr lang="en-US"/>
           </a:p>
@@ -1787,7 +2321,117 @@
         </p:nvSpPr>
         <p:spPr>
           <a:xfrm>
-            <a:off x="406301" y="1223963"/>
+            <a:off x="406301" y="4434929"/>
+            <a:ext cx="8498026" cy="213271"/>
+          </a:xfrm>
+          <a:prstGeom prst="rect">
+            <a:avLst/>
+          </a:prstGeom>
+          <a:noFill/>
+          <a:ln/>
+        </p:spPr>
+        <p:txBody>
+          <a:bodyPr wrap="square" lIns="0" tIns="0" rIns="0" bIns="0" rtlCol="0" anchor="t"/>
+          <a:lstStyle/>
+          <a:p>
+            <a:pPr algn="l" indent="0" marL="0">
+              <a:lnSpc>
+                <a:spcPts val="1680"/>
+              </a:lnSpc>
+              <a:spcBef>
+                <a:spcPts val="300"/>
+              </a:spcBef>
+              <a:spcAft>
+                <a:spcPts val="300"/>
+              </a:spcAft>
+              <a:buNone/>
+            </a:pPr>
+            <a:r>
+              <a:rPr lang="en-US" sz="1200" dirty="0">
+                <a:solidFill>
+                  <a:srgbClr val="1A1A1A"/>
+                </a:solidFill>
+                <a:latin typeface="Georgia" pitchFamily="34" charset="0"/>
+                <a:ea typeface="Georgia" pitchFamily="34" charset="-122"/>
+                <a:cs typeface="Georgia" pitchFamily="34" charset="-120"/>
+              </a:rPr>
+              <a:t>Senior ·  · IKS Curriculum</a:t>
+            </a:r>
+            <a:endParaRPr lang="en-US" sz="1200" dirty="0"/>
+          </a:p>
+        </p:txBody>
+      </p:sp>
+    </p:spTree>
+  </p:cSld>
+  <p:clrMapOvr>
+    <a:masterClrMapping/>
+  </p:clrMapOvr>
+</p:sld>
+</file>
+
+<file path=ppt/slides/slide10.xml><?xml version="1.0" encoding="utf-8"?>
+<p:sld xmlns:a="http://schemas.openxmlformats.org/drawingml/2006/main" xmlns:r="http://schemas.openxmlformats.org/officeDocument/2006/relationships" xmlns:p="http://schemas.openxmlformats.org/presentationml/2006/main">
+  <p:cSld name="Slide 10">
+    <p:bg>
+      <p:bgPr>
+        <a:solidFill>
+          <a:srgbClr val="FAF7F2"/>
+        </a:solidFill>
+      </p:bgPr>
+    </p:bg>
+    <p:spTree>
+      <p:nvGrpSpPr>
+        <p:cNvPr id="1" name=""/>
+        <p:cNvGrpSpPr/>
+        <p:nvPr/>
+      </p:nvGrpSpPr>
+      <p:grpSpPr>
+        <a:xfrm>
+          <a:off x="0" y="0"/>
+          <a:ext cx="0" cy="0"/>
+          <a:chOff x="0" y="0"/>
+          <a:chExt cx="0" cy="0"/>
+        </a:xfrm>
+      </p:grpSpPr>
+      <p:sp>
+        <p:nvSpPr>
+          <p:cNvPr id="2" name="Text 0"/>
+          <p:cNvSpPr/>
+          <p:nvPr/>
+        </p:nvSpPr>
+        <p:spPr>
+          <a:xfrm>
+            <a:off x="0" y="0"/>
+            <a:ext cx="9144000" cy="101501"/>
+          </a:xfrm>
+          <a:prstGeom prst="rect">
+            <a:avLst/>
+          </a:prstGeom>
+          <a:solidFill>
+            <a:srgbClr val="5D1D2E"/>
+          </a:solidFill>
+          <a:ln/>
+        </p:spPr>
+        <p:txBody>
+          <a:bodyPr wrap="square" rtlCol="0" anchor="ctr"/>
+          <a:lstStyle/>
+          <a:p>
+            <a:pPr indent="0" marL="0">
+              <a:buNone/>
+            </a:pPr>
+            <a:endParaRPr lang="en-US" dirty="0"/>
+          </a:p>
+        </p:txBody>
+      </p:sp>
+      <p:sp>
+        <p:nvSpPr>
+          <p:cNvPr id="3" name="Text 1"/>
+          <p:cNvSpPr/>
+          <p:nvPr/>
+        </p:nvSpPr>
+        <p:spPr>
+          <a:xfrm>
+            <a:off x="406301" y="457051"/>
             <a:ext cx="8498026" cy="274290"/>
           </a:xfrm>
           <a:prstGeom prst="rect">
@@ -1821,7 +2465,7 @@
                 <a:ea typeface="Times New Roman" pitchFamily="34" charset="-122"/>
                 <a:cs typeface="Times New Roman" pitchFamily="34" charset="-120"/>
               </a:rPr>
-              <a:t>Learning objective</a:t>
+              <a:t>Core (25 min) (cont.)</a:t>
             </a:r>
             <a:endParaRPr lang="en-US" sz="1800" dirty="0"/>
           </a:p>
@@ -1829,14 +2473,14 @@
       </p:sp>
       <p:sp>
         <p:nvSpPr>
-          <p:cNvPr id="6" name="Text 4"/>
+          <p:cNvPr id="4" name="Text 2"/>
           <p:cNvSpPr/>
           <p:nvPr/>
         </p:nvSpPr>
         <p:spPr>
           <a:xfrm>
-            <a:off x="406301" y="1637854"/>
-            <a:ext cx="8498026" cy="213271"/>
+            <a:off x="634901" y="883593"/>
+            <a:ext cx="8102798" cy="487561"/>
           </a:xfrm>
           <a:prstGeom prst="rect">
             <a:avLst/>
@@ -1848,8 +2492,74 @@
           <a:bodyPr wrap="square" lIns="0" tIns="0" rIns="0" bIns="0" rtlCol="0" anchor="t"/>
           <a:lstStyle/>
           <a:p>
+            <a:pPr algn="l" marL="342900" indent="-342900">
+              <a:lnSpc>
+                <a:spcPts val="1620"/>
+              </a:lnSpc>
+              <a:spcAft>
+                <a:spcPts val="300"/>
+              </a:spcAft>
+              <a:buSzPct val="100000"/>
+              <a:buChar char="•"/>
+            </a:pPr>
+            <a:r>
+              <a:rPr lang="en-US" sz="1200" b="1" dirty="0">
+                <a:solidFill>
+                  <a:srgbClr val="1A1A1A"/>
+                </a:solidFill>
+                <a:latin typeface="Georgia" pitchFamily="34" charset="0"/>
+                <a:ea typeface="Georgia" pitchFamily="34" charset="-122"/>
+                <a:cs typeface="Georgia" pitchFamily="34" charset="-120"/>
+              </a:rPr>
+              <a:t>The honest scope:</a:t>
+            </a:r>
             <a:pPr algn="l" indent="0" marL="0">
               <a:lnSpc>
+                <a:spcPts val="1620"/>
+              </a:lnSpc>
+              <a:spcAft>
+                <a:spcPts val="300"/>
+              </a:spcAft>
+              <a:buNone/>
+            </a:pPr>
+            <a:r>
+              <a:rPr lang="en-US" sz="1200" dirty="0">
+                <a:solidFill>
+                  <a:srgbClr val="1A1A1A"/>
+                </a:solidFill>
+                <a:latin typeface="Georgia" pitchFamily="34" charset="0"/>
+                <a:ea typeface="Georgia" pitchFamily="34" charset="-122"/>
+                <a:cs typeface="Georgia" pitchFamily="34" charset="-120"/>
+              </a:rPr>
+              <a:t> Ayurveda was (and is) a comprehensive medical system covering internal medicine, surgery, pediatrics, psychiatry, ENT, toxicology. It is NOT just "herbs."</a:t>
+            </a:r>
+            <a:endParaRPr lang="en-US" sz="1200" dirty="0"/>
+          </a:p>
+        </p:txBody>
+      </p:sp>
+      <p:sp>
+        <p:nvSpPr>
+          <p:cNvPr id="5" name="Text 3"/>
+          <p:cNvSpPr/>
+          <p:nvPr/>
+        </p:nvSpPr>
+        <p:spPr>
+          <a:xfrm>
+            <a:off x="406301" y="4434929"/>
+            <a:ext cx="8498026" cy="213271"/>
+          </a:xfrm>
+          <a:prstGeom prst="rect">
+            <a:avLst/>
+          </a:prstGeom>
+          <a:noFill/>
+          <a:ln/>
+        </p:spPr>
+        <p:txBody>
+          <a:bodyPr wrap="square" lIns="0" tIns="0" rIns="0" bIns="0" rtlCol="0" anchor="t"/>
+          <a:lstStyle/>
+          <a:p>
+            <a:pPr algn="l" indent="0" marL="0">
+              <a:lnSpc>
                 <a:spcPts val="1680"/>
               </a:lnSpc>
               <a:spcBef>
@@ -1869,15 +2579,1143 @@
                 <a:ea typeface="Georgia" pitchFamily="34" charset="-122"/>
                 <a:cs typeface="Georgia" pitchFamily="34" charset="-120"/>
               </a:rPr>
-              <a:t>Students locate Ayurveda within the IKS map and name the 8 branches and 3 foundational texts.</a:t>
+              <a:t>Senior ·  · IKS Curriculum</a:t>
             </a:r>
             <a:endParaRPr lang="en-US" sz="1200" dirty="0"/>
           </a:p>
         </p:txBody>
       </p:sp>
-      <p:sp>
-        <p:nvSpPr>
-          <p:cNvPr id="7" name="Text 5"/>
+    </p:spTree>
+  </p:cSld>
+  <p:clrMapOvr>
+    <a:masterClrMapping/>
+  </p:clrMapOvr>
+</p:sld>
+</file>
+
+<file path=ppt/slides/slide11.xml><?xml version="1.0" encoding="utf-8"?>
+<p:sld xmlns:a="http://schemas.openxmlformats.org/drawingml/2006/main" xmlns:r="http://schemas.openxmlformats.org/officeDocument/2006/relationships" xmlns:p="http://schemas.openxmlformats.org/presentationml/2006/main">
+  <p:cSld name="Slide 11">
+    <p:bg>
+      <p:bgPr>
+        <a:solidFill>
+          <a:srgbClr val="FAF7F2"/>
+        </a:solidFill>
+      </p:bgPr>
+    </p:bg>
+    <p:spTree>
+      <p:nvGrpSpPr>
+        <p:cNvPr id="1" name=""/>
+        <p:cNvGrpSpPr/>
+        <p:nvPr/>
+      </p:nvGrpSpPr>
+      <p:grpSpPr>
+        <a:xfrm>
+          <a:off x="0" y="0"/>
+          <a:ext cx="0" cy="0"/>
+          <a:chOff x="0" y="0"/>
+          <a:chExt cx="0" cy="0"/>
+        </a:xfrm>
+      </p:grpSpPr>
+      <p:sp>
+        <p:nvSpPr>
+          <p:cNvPr id="2" name="Text 0"/>
+          <p:cNvSpPr/>
+          <p:nvPr/>
+        </p:nvSpPr>
+        <p:spPr>
+          <a:xfrm>
+            <a:off x="0" y="0"/>
+            <a:ext cx="9144000" cy="101501"/>
+          </a:xfrm>
+          <a:prstGeom prst="rect">
+            <a:avLst/>
+          </a:prstGeom>
+          <a:solidFill>
+            <a:srgbClr val="5D1D2E"/>
+          </a:solidFill>
+          <a:ln/>
+        </p:spPr>
+        <p:txBody>
+          <a:bodyPr wrap="square" rtlCol="0" anchor="ctr"/>
+          <a:lstStyle/>
+          <a:p>
+            <a:pPr indent="0" marL="0">
+              <a:buNone/>
+            </a:pPr>
+            <a:endParaRPr lang="en-US" dirty="0"/>
+          </a:p>
+        </p:txBody>
+      </p:sp>
+      <p:sp>
+        <p:nvSpPr>
+          <p:cNvPr id="3" name="Text 1"/>
+          <p:cNvSpPr/>
+          <p:nvPr/>
+        </p:nvSpPr>
+        <p:spPr>
+          <a:xfrm>
+            <a:off x="406301" y="457051"/>
+            <a:ext cx="8498026" cy="274290"/>
+          </a:xfrm>
+          <a:prstGeom prst="rect">
+            <a:avLst/>
+          </a:prstGeom>
+          <a:noFill/>
+          <a:ln/>
+        </p:spPr>
+        <p:txBody>
+          <a:bodyPr wrap="square" lIns="0" tIns="0" rIns="0" bIns="0" rtlCol="0" anchor="t"/>
+          <a:lstStyle/>
+          <a:p>
+            <a:pPr algn="l" indent="0" marL="0">
+              <a:lnSpc>
+                <a:spcPts val="2160"/>
+              </a:lnSpc>
+              <a:spcBef>
+                <a:spcPts val="600"/>
+              </a:spcBef>
+              <a:spcAft>
+                <a:spcPts val="800"/>
+              </a:spcAft>
+              <a:buNone/>
+            </a:pPr>
+            <a:r>
+              <a:rPr lang="en-US" sz="1800" b="1" dirty="0">
+                <a:solidFill>
+                  <a:srgbClr val="997929"/>
+                </a:solidFill>
+                <a:latin typeface="Times New Roman" pitchFamily="34" charset="0"/>
+                <a:ea typeface="Times New Roman" pitchFamily="34" charset="-122"/>
+                <a:cs typeface="Times New Roman" pitchFamily="34" charset="-120"/>
+              </a:rPr>
+              <a:t>Discussion (10 min)</a:t>
+            </a:r>
+            <a:endParaRPr lang="en-US" sz="1800" dirty="0"/>
+          </a:p>
+        </p:txBody>
+      </p:sp>
+      <p:sp>
+        <p:nvSpPr>
+          <p:cNvPr id="4" name="Text 2"/>
+          <p:cNvSpPr/>
+          <p:nvPr/>
+        </p:nvSpPr>
+        <p:spPr>
+          <a:xfrm>
+            <a:off x="634901" y="883593"/>
+            <a:ext cx="8102798" cy="525661"/>
+          </a:xfrm>
+          <a:prstGeom prst="rect">
+            <a:avLst/>
+          </a:prstGeom>
+          <a:noFill/>
+          <a:ln/>
+        </p:spPr>
+        <p:txBody>
+          <a:bodyPr wrap="square" lIns="0" tIns="0" rIns="0" bIns="0" rtlCol="0" anchor="t"/>
+          <a:lstStyle/>
+          <a:p>
+            <a:pPr algn="l" marL="342900" indent="-342900">
+              <a:lnSpc>
+                <a:spcPts val="1620"/>
+              </a:lnSpc>
+              <a:spcAft>
+                <a:spcPts val="300"/>
+              </a:spcAft>
+              <a:buSzPct val="100000"/>
+              <a:buChar char="•"/>
+            </a:pPr>
+            <a:r>
+              <a:rPr lang="en-US" sz="1200" dirty="0">
+                <a:solidFill>
+                  <a:srgbClr val="1A1A1A"/>
+                </a:solidFill>
+                <a:latin typeface="Georgia" pitchFamily="34" charset="0"/>
+                <a:ea typeface="Georgia" pitchFamily="34" charset="-122"/>
+                <a:cs typeface="Georgia" pitchFamily="34" charset="-120"/>
+              </a:rPr>
+              <a:t>Which branch surprised you most?</a:t>
+            </a:r>
+            <a:endParaRPr lang="en-US" sz="1200" dirty="0"/>
+          </a:p>
+          <a:p>
+            <a:pPr algn="l" marL="342900" indent="-342900">
+              <a:lnSpc>
+                <a:spcPts val="1620"/>
+              </a:lnSpc>
+              <a:spcAft>
+                <a:spcPts val="300"/>
+              </a:spcAft>
+              <a:buSzPct val="100000"/>
+              <a:buChar char="•"/>
+            </a:pPr>
+            <a:r>
+              <a:rPr lang="en-US" sz="1200" dirty="0">
+                <a:solidFill>
+                  <a:srgbClr val="1A1A1A"/>
+                </a:solidFill>
+                <a:latin typeface="Georgia" pitchFamily="34" charset="0"/>
+                <a:ea typeface="Georgia" pitchFamily="34" charset="-122"/>
+                <a:cs typeface="Georgia" pitchFamily="34" charset="-120"/>
+              </a:rPr>
+              <a:t>Where does Ayurveda overlap with modern medicine cleanly?</a:t>
+            </a:r>
+            <a:endParaRPr lang="en-US" sz="1200" dirty="0"/>
+          </a:p>
+        </p:txBody>
+      </p:sp>
+      <p:sp>
+        <p:nvSpPr>
+          <p:cNvPr id="5" name="Text 3"/>
+          <p:cNvSpPr/>
+          <p:nvPr/>
+        </p:nvSpPr>
+        <p:spPr>
+          <a:xfrm>
+            <a:off x="406301" y="4434929"/>
+            <a:ext cx="8498026" cy="213271"/>
+          </a:xfrm>
+          <a:prstGeom prst="rect">
+            <a:avLst/>
+          </a:prstGeom>
+          <a:noFill/>
+          <a:ln/>
+        </p:spPr>
+        <p:txBody>
+          <a:bodyPr wrap="square" lIns="0" tIns="0" rIns="0" bIns="0" rtlCol="0" anchor="t"/>
+          <a:lstStyle/>
+          <a:p>
+            <a:pPr algn="l" indent="0" marL="0">
+              <a:lnSpc>
+                <a:spcPts val="1680"/>
+              </a:lnSpc>
+              <a:spcBef>
+                <a:spcPts val="300"/>
+              </a:spcBef>
+              <a:spcAft>
+                <a:spcPts val="300"/>
+              </a:spcAft>
+              <a:buNone/>
+            </a:pPr>
+            <a:r>
+              <a:rPr lang="en-US" sz="1200" dirty="0">
+                <a:solidFill>
+                  <a:srgbClr val="1A1A1A"/>
+                </a:solidFill>
+                <a:latin typeface="Georgia" pitchFamily="34" charset="0"/>
+                <a:ea typeface="Georgia" pitchFamily="34" charset="-122"/>
+                <a:cs typeface="Georgia" pitchFamily="34" charset="-120"/>
+              </a:rPr>
+              <a:t>Senior ·  · IKS Curriculum</a:t>
+            </a:r>
+            <a:endParaRPr lang="en-US" sz="1200" dirty="0"/>
+          </a:p>
+        </p:txBody>
+      </p:sp>
+    </p:spTree>
+  </p:cSld>
+  <p:clrMapOvr>
+    <a:masterClrMapping/>
+  </p:clrMapOvr>
+</p:sld>
+</file>
+
+<file path=ppt/slides/slide12.xml><?xml version="1.0" encoding="utf-8"?>
+<p:sld xmlns:a="http://schemas.openxmlformats.org/drawingml/2006/main" xmlns:r="http://schemas.openxmlformats.org/officeDocument/2006/relationships" xmlns:p="http://schemas.openxmlformats.org/presentationml/2006/main">
+  <p:cSld name="Slide 12">
+    <p:bg>
+      <p:bgPr>
+        <a:solidFill>
+          <a:srgbClr val="FAF7F2"/>
+        </a:solidFill>
+      </p:bgPr>
+    </p:bg>
+    <p:spTree>
+      <p:nvGrpSpPr>
+        <p:cNvPr id="1" name=""/>
+        <p:cNvGrpSpPr/>
+        <p:nvPr/>
+      </p:nvGrpSpPr>
+      <p:grpSpPr>
+        <a:xfrm>
+          <a:off x="0" y="0"/>
+          <a:ext cx="0" cy="0"/>
+          <a:chOff x="0" y="0"/>
+          <a:chExt cx="0" cy="0"/>
+        </a:xfrm>
+      </p:grpSpPr>
+      <p:sp>
+        <p:nvSpPr>
+          <p:cNvPr id="2" name="Text 0"/>
+          <p:cNvSpPr/>
+          <p:nvPr/>
+        </p:nvSpPr>
+        <p:spPr>
+          <a:xfrm>
+            <a:off x="0" y="0"/>
+            <a:ext cx="9144000" cy="101501"/>
+          </a:xfrm>
+          <a:prstGeom prst="rect">
+            <a:avLst/>
+          </a:prstGeom>
+          <a:solidFill>
+            <a:srgbClr val="5D1D2E"/>
+          </a:solidFill>
+          <a:ln/>
+        </p:spPr>
+        <p:txBody>
+          <a:bodyPr wrap="square" rtlCol="0" anchor="ctr"/>
+          <a:lstStyle/>
+          <a:p>
+            <a:pPr indent="0" marL="0">
+              <a:buNone/>
+            </a:pPr>
+            <a:endParaRPr lang="en-US" dirty="0"/>
+          </a:p>
+        </p:txBody>
+      </p:sp>
+      <p:sp>
+        <p:nvSpPr>
+          <p:cNvPr id="3" name="Text 1"/>
+          <p:cNvSpPr/>
+          <p:nvPr/>
+        </p:nvSpPr>
+        <p:spPr>
+          <a:xfrm>
+            <a:off x="406301" y="457051"/>
+            <a:ext cx="8498026" cy="274290"/>
+          </a:xfrm>
+          <a:prstGeom prst="rect">
+            <a:avLst/>
+          </a:prstGeom>
+          <a:noFill/>
+          <a:ln/>
+        </p:spPr>
+        <p:txBody>
+          <a:bodyPr wrap="square" lIns="0" tIns="0" rIns="0" bIns="0" rtlCol="0" anchor="t"/>
+          <a:lstStyle/>
+          <a:p>
+            <a:pPr algn="l" indent="0" marL="0">
+              <a:lnSpc>
+                <a:spcPts val="2160"/>
+              </a:lnSpc>
+              <a:spcBef>
+                <a:spcPts val="600"/>
+              </a:spcBef>
+              <a:spcAft>
+                <a:spcPts val="800"/>
+              </a:spcAft>
+              <a:buNone/>
+            </a:pPr>
+            <a:r>
+              <a:rPr lang="en-US" sz="1800" b="1" dirty="0">
+                <a:solidFill>
+                  <a:srgbClr val="997929"/>
+                </a:solidFill>
+                <a:latin typeface="Times New Roman" pitchFamily="34" charset="0"/>
+                <a:ea typeface="Times New Roman" pitchFamily="34" charset="-122"/>
+                <a:cs typeface="Times New Roman" pitchFamily="34" charset="-120"/>
+              </a:rPr>
+              <a:t>Wrap-up (5 min)</a:t>
+            </a:r>
+            <a:endParaRPr lang="en-US" sz="1800" dirty="0"/>
+          </a:p>
+        </p:txBody>
+      </p:sp>
+      <p:sp>
+        <p:nvSpPr>
+          <p:cNvPr id="4" name="Text 2"/>
+          <p:cNvSpPr/>
+          <p:nvPr/>
+        </p:nvSpPr>
+        <p:spPr>
+          <a:xfrm>
+            <a:off x="634901" y="883593"/>
+            <a:ext cx="8102798" cy="281880"/>
+          </a:xfrm>
+          <a:prstGeom prst="rect">
+            <a:avLst/>
+          </a:prstGeom>
+          <a:noFill/>
+          <a:ln/>
+        </p:spPr>
+        <p:txBody>
+          <a:bodyPr wrap="square" lIns="0" tIns="0" rIns="0" bIns="0" rtlCol="0" anchor="t"/>
+          <a:lstStyle/>
+          <a:p>
+            <a:pPr algn="l" marL="342900" indent="-342900">
+              <a:lnSpc>
+                <a:spcPts val="1620"/>
+              </a:lnSpc>
+              <a:spcAft>
+                <a:spcPts val="300"/>
+              </a:spcAft>
+              <a:buSzPct val="100000"/>
+              <a:buChar char="•"/>
+            </a:pPr>
+            <a:r>
+              <a:rPr lang="en-US" sz="1200" dirty="0">
+                <a:solidFill>
+                  <a:srgbClr val="1A1A1A"/>
+                </a:solidFill>
+                <a:latin typeface="Georgia" pitchFamily="34" charset="0"/>
+                <a:ea typeface="Georgia" pitchFamily="34" charset="-122"/>
+                <a:cs typeface="Georgia" pitchFamily="34" charset="-120"/>
+              </a:rPr>
+              <a:t>Preview Day 2: </a:t>
+            </a:r>
+            <a:pPr algn="l" indent="0" marL="0">
+              <a:lnSpc>
+                <a:spcPts val="1620"/>
+              </a:lnSpc>
+              <a:spcAft>
+                <a:spcPts val="300"/>
+              </a:spcAft>
+              <a:buNone/>
+            </a:pPr>
+            <a:r>
+              <a:rPr lang="en-US" sz="1200" i="1" dirty="0">
+                <a:solidFill>
+                  <a:srgbClr val="1A1A1A"/>
+                </a:solidFill>
+                <a:latin typeface="Georgia" pitchFamily="34" charset="0"/>
+                <a:ea typeface="Georgia" pitchFamily="34" charset="-122"/>
+                <a:cs typeface="Georgia" pitchFamily="34" charset="-120"/>
+              </a:rPr>
+              <a:t>"Tomorrow — we read Caraka Saṃhitā Sūtra-sthāna ch. 1 in IAST."</a:t>
+            </a:r>
+            <a:endParaRPr lang="en-US" sz="1200" dirty="0"/>
+          </a:p>
+        </p:txBody>
+      </p:sp>
+      <p:sp>
+        <p:nvSpPr>
+          <p:cNvPr id="5" name="Text 3"/>
+          <p:cNvSpPr/>
+          <p:nvPr/>
+        </p:nvSpPr>
+        <p:spPr>
+          <a:xfrm>
+            <a:off x="406301" y="4434929"/>
+            <a:ext cx="8498026" cy="213271"/>
+          </a:xfrm>
+          <a:prstGeom prst="rect">
+            <a:avLst/>
+          </a:prstGeom>
+          <a:noFill/>
+          <a:ln/>
+        </p:spPr>
+        <p:txBody>
+          <a:bodyPr wrap="square" lIns="0" tIns="0" rIns="0" bIns="0" rtlCol="0" anchor="t"/>
+          <a:lstStyle/>
+          <a:p>
+            <a:pPr algn="l" indent="0" marL="0">
+              <a:lnSpc>
+                <a:spcPts val="1680"/>
+              </a:lnSpc>
+              <a:spcBef>
+                <a:spcPts val="300"/>
+              </a:spcBef>
+              <a:spcAft>
+                <a:spcPts val="300"/>
+              </a:spcAft>
+              <a:buNone/>
+            </a:pPr>
+            <a:r>
+              <a:rPr lang="en-US" sz="1200" dirty="0">
+                <a:solidFill>
+                  <a:srgbClr val="1A1A1A"/>
+                </a:solidFill>
+                <a:latin typeface="Georgia" pitchFamily="34" charset="0"/>
+                <a:ea typeface="Georgia" pitchFamily="34" charset="-122"/>
+                <a:cs typeface="Georgia" pitchFamily="34" charset="-120"/>
+              </a:rPr>
+              <a:t>Senior ·  · IKS Curriculum</a:t>
+            </a:r>
+            <a:endParaRPr lang="en-US" sz="1200" dirty="0"/>
+          </a:p>
+        </p:txBody>
+      </p:sp>
+    </p:spTree>
+  </p:cSld>
+  <p:clrMapOvr>
+    <a:masterClrMapping/>
+  </p:clrMapOvr>
+</p:sld>
+</file>
+
+<file path=ppt/slides/slide13.xml><?xml version="1.0" encoding="utf-8"?>
+<p:sld xmlns:a="http://schemas.openxmlformats.org/drawingml/2006/main" xmlns:r="http://schemas.openxmlformats.org/officeDocument/2006/relationships" xmlns:p="http://schemas.openxmlformats.org/presentationml/2006/main">
+  <p:cSld name="Slide 13">
+    <p:bg>
+      <p:bgPr>
+        <a:solidFill>
+          <a:srgbClr val="FAF7F2"/>
+        </a:solidFill>
+      </p:bgPr>
+    </p:bg>
+    <p:spTree>
+      <p:nvGrpSpPr>
+        <p:cNvPr id="1" name=""/>
+        <p:cNvGrpSpPr/>
+        <p:nvPr/>
+      </p:nvGrpSpPr>
+      <p:grpSpPr>
+        <a:xfrm>
+          <a:off x="0" y="0"/>
+          <a:ext cx="0" cy="0"/>
+          <a:chOff x="0" y="0"/>
+          <a:chExt cx="0" cy="0"/>
+        </a:xfrm>
+      </p:grpSpPr>
+      <p:sp>
+        <p:nvSpPr>
+          <p:cNvPr id="2" name="Text 0"/>
+          <p:cNvSpPr/>
+          <p:nvPr/>
+        </p:nvSpPr>
+        <p:spPr>
+          <a:xfrm>
+            <a:off x="0" y="0"/>
+            <a:ext cx="9144000" cy="101501"/>
+          </a:xfrm>
+          <a:prstGeom prst="rect">
+            <a:avLst/>
+          </a:prstGeom>
+          <a:solidFill>
+            <a:srgbClr val="5D1D2E"/>
+          </a:solidFill>
+          <a:ln/>
+        </p:spPr>
+        <p:txBody>
+          <a:bodyPr wrap="square" rtlCol="0" anchor="ctr"/>
+          <a:lstStyle/>
+          <a:p>
+            <a:pPr indent="0" marL="0">
+              <a:buNone/>
+            </a:pPr>
+            <a:endParaRPr lang="en-US" dirty="0"/>
+          </a:p>
+        </p:txBody>
+      </p:sp>
+      <p:sp>
+        <p:nvSpPr>
+          <p:cNvPr id="3" name="Text 1"/>
+          <p:cNvSpPr/>
+          <p:nvPr/>
+        </p:nvSpPr>
+        <p:spPr>
+          <a:xfrm>
+            <a:off x="406301" y="457051"/>
+            <a:ext cx="8498026" cy="274290"/>
+          </a:xfrm>
+          <a:prstGeom prst="rect">
+            <a:avLst/>
+          </a:prstGeom>
+          <a:noFill/>
+          <a:ln/>
+        </p:spPr>
+        <p:txBody>
+          <a:bodyPr wrap="square" lIns="0" tIns="0" rIns="0" bIns="0" rtlCol="0" anchor="t"/>
+          <a:lstStyle/>
+          <a:p>
+            <a:pPr algn="l" indent="0" marL="0">
+              <a:lnSpc>
+                <a:spcPts val="2160"/>
+              </a:lnSpc>
+              <a:spcBef>
+                <a:spcPts val="600"/>
+              </a:spcBef>
+              <a:spcAft>
+                <a:spcPts val="800"/>
+              </a:spcAft>
+              <a:buNone/>
+            </a:pPr>
+            <a:r>
+              <a:rPr lang="en-US" sz="1800" b="1" dirty="0">
+                <a:solidFill>
+                  <a:srgbClr val="997929"/>
+                </a:solidFill>
+                <a:latin typeface="Times New Roman" pitchFamily="34" charset="0"/>
+                <a:ea typeface="Times New Roman" pitchFamily="34" charset="-122"/>
+                <a:cs typeface="Times New Roman" pitchFamily="34" charset="-120"/>
+              </a:rPr>
+              <a:t>Differentiation</a:t>
+            </a:r>
+            <a:endParaRPr lang="en-US" sz="1800" dirty="0"/>
+          </a:p>
+        </p:txBody>
+      </p:sp>
+      <p:sp>
+        <p:nvSpPr>
+          <p:cNvPr id="4" name="Text 2"/>
+          <p:cNvSpPr/>
+          <p:nvPr/>
+        </p:nvSpPr>
+        <p:spPr>
+          <a:xfrm>
+            <a:off x="634901" y="883593"/>
+            <a:ext cx="8102798" cy="525661"/>
+          </a:xfrm>
+          <a:prstGeom prst="rect">
+            <a:avLst/>
+          </a:prstGeom>
+          <a:noFill/>
+          <a:ln/>
+        </p:spPr>
+        <p:txBody>
+          <a:bodyPr wrap="square" lIns="0" tIns="0" rIns="0" bIns="0" rtlCol="0" anchor="t"/>
+          <a:lstStyle/>
+          <a:p>
+            <a:pPr algn="l" marL="342900" indent="-342900">
+              <a:lnSpc>
+                <a:spcPts val="1620"/>
+              </a:lnSpc>
+              <a:spcAft>
+                <a:spcPts val="300"/>
+              </a:spcAft>
+              <a:buSzPct val="100000"/>
+              <a:buChar char="•"/>
+            </a:pPr>
+            <a:r>
+              <a:rPr lang="en-US" sz="1200" b="1" dirty="0">
+                <a:solidFill>
+                  <a:srgbClr val="1A1A1A"/>
+                </a:solidFill>
+                <a:latin typeface="Georgia" pitchFamily="34" charset="0"/>
+                <a:ea typeface="Georgia" pitchFamily="34" charset="-122"/>
+                <a:cs typeface="Georgia" pitchFamily="34" charset="-120"/>
+              </a:rPr>
+              <a:t>Tier up:</a:t>
+            </a:r>
+            <a:pPr algn="l" indent="0" marL="0">
+              <a:lnSpc>
+                <a:spcPts val="1620"/>
+              </a:lnSpc>
+              <a:spcAft>
+                <a:spcPts val="300"/>
+              </a:spcAft>
+              <a:buNone/>
+            </a:pPr>
+            <a:r>
+              <a:rPr lang="en-US" sz="1200" dirty="0">
+                <a:solidFill>
+                  <a:srgbClr val="1A1A1A"/>
+                </a:solidFill>
+                <a:latin typeface="Georgia" pitchFamily="34" charset="0"/>
+                <a:ea typeface="Georgia" pitchFamily="34" charset="-122"/>
+                <a:cs typeface="Georgia" pitchFamily="34" charset="-120"/>
+              </a:rPr>
+              <a:t> Read Wujastyk (2003) intro chapter.</a:t>
+            </a:r>
+            <a:endParaRPr lang="en-US" sz="1200" dirty="0"/>
+          </a:p>
+          <a:p>
+            <a:pPr algn="l" marL="342900" indent="-342900">
+              <a:lnSpc>
+                <a:spcPts val="1620"/>
+              </a:lnSpc>
+              <a:spcAft>
+                <a:spcPts val="300"/>
+              </a:spcAft>
+              <a:buSzPct val="100000"/>
+              <a:buChar char="•"/>
+            </a:pPr>
+            <a:r>
+              <a:rPr lang="en-US" sz="1200" b="1" dirty="0">
+                <a:solidFill>
+                  <a:srgbClr val="1A1A1A"/>
+                </a:solidFill>
+                <a:latin typeface="Georgia" pitchFamily="34" charset="0"/>
+                <a:ea typeface="Georgia" pitchFamily="34" charset="-122"/>
+                <a:cs typeface="Georgia" pitchFamily="34" charset="-120"/>
+              </a:rPr>
+              <a:t>Tier down:</a:t>
+            </a:r>
+            <a:pPr algn="l" indent="0" marL="0">
+              <a:lnSpc>
+                <a:spcPts val="1620"/>
+              </a:lnSpc>
+              <a:spcAft>
+                <a:spcPts val="300"/>
+              </a:spcAft>
+              <a:buNone/>
+            </a:pPr>
+            <a:r>
+              <a:rPr lang="en-US" sz="1200" dirty="0">
+                <a:solidFill>
+                  <a:srgbClr val="1A1A1A"/>
+                </a:solidFill>
+                <a:latin typeface="Georgia" pitchFamily="34" charset="0"/>
+                <a:ea typeface="Georgia" pitchFamily="34" charset="-122"/>
+                <a:cs typeface="Georgia" pitchFamily="34" charset="-120"/>
+              </a:rPr>
+              <a:t> Memorise the 3 foundational texts + 4 of the 8 branches.</a:t>
+            </a:r>
+            <a:endParaRPr lang="en-US" sz="1200" dirty="0"/>
+          </a:p>
+        </p:txBody>
+      </p:sp>
+      <p:sp>
+        <p:nvSpPr>
+          <p:cNvPr id="5" name="Text 3"/>
+          <p:cNvSpPr/>
+          <p:nvPr/>
+        </p:nvSpPr>
+        <p:spPr>
+          <a:xfrm>
+            <a:off x="406301" y="4434929"/>
+            <a:ext cx="8498026" cy="213271"/>
+          </a:xfrm>
+          <a:prstGeom prst="rect">
+            <a:avLst/>
+          </a:prstGeom>
+          <a:noFill/>
+          <a:ln/>
+        </p:spPr>
+        <p:txBody>
+          <a:bodyPr wrap="square" lIns="0" tIns="0" rIns="0" bIns="0" rtlCol="0" anchor="t"/>
+          <a:lstStyle/>
+          <a:p>
+            <a:pPr algn="l" indent="0" marL="0">
+              <a:lnSpc>
+                <a:spcPts val="1680"/>
+              </a:lnSpc>
+              <a:spcBef>
+                <a:spcPts val="300"/>
+              </a:spcBef>
+              <a:spcAft>
+                <a:spcPts val="300"/>
+              </a:spcAft>
+              <a:buNone/>
+            </a:pPr>
+            <a:r>
+              <a:rPr lang="en-US" sz="1200" dirty="0">
+                <a:solidFill>
+                  <a:srgbClr val="1A1A1A"/>
+                </a:solidFill>
+                <a:latin typeface="Georgia" pitchFamily="34" charset="0"/>
+                <a:ea typeface="Georgia" pitchFamily="34" charset="-122"/>
+                <a:cs typeface="Georgia" pitchFamily="34" charset="-120"/>
+              </a:rPr>
+              <a:t>Senior ·  · IKS Curriculum</a:t>
+            </a:r>
+            <a:endParaRPr lang="en-US" sz="1200" dirty="0"/>
+          </a:p>
+        </p:txBody>
+      </p:sp>
+    </p:spTree>
+  </p:cSld>
+  <p:clrMapOvr>
+    <a:masterClrMapping/>
+  </p:clrMapOvr>
+</p:sld>
+</file>
+
+<file path=ppt/slides/slide14.xml><?xml version="1.0" encoding="utf-8"?>
+<p:sld xmlns:a="http://schemas.openxmlformats.org/drawingml/2006/main" xmlns:r="http://schemas.openxmlformats.org/officeDocument/2006/relationships" xmlns:p="http://schemas.openxmlformats.org/presentationml/2006/main">
+  <p:cSld name="Slide 14">
+    <p:bg>
+      <p:bgPr>
+        <a:solidFill>
+          <a:srgbClr val="FAF7F2"/>
+        </a:solidFill>
+      </p:bgPr>
+    </p:bg>
+    <p:spTree>
+      <p:nvGrpSpPr>
+        <p:cNvPr id="1" name=""/>
+        <p:cNvGrpSpPr/>
+        <p:nvPr/>
+      </p:nvGrpSpPr>
+      <p:grpSpPr>
+        <a:xfrm>
+          <a:off x="0" y="0"/>
+          <a:ext cx="0" cy="0"/>
+          <a:chOff x="0" y="0"/>
+          <a:chExt cx="0" cy="0"/>
+        </a:xfrm>
+      </p:grpSpPr>
+      <p:sp>
+        <p:nvSpPr>
+          <p:cNvPr id="2" name="Text 0"/>
+          <p:cNvSpPr/>
+          <p:nvPr/>
+        </p:nvSpPr>
+        <p:spPr>
+          <a:xfrm>
+            <a:off x="0" y="0"/>
+            <a:ext cx="9144000" cy="101501"/>
+          </a:xfrm>
+          <a:prstGeom prst="rect">
+            <a:avLst/>
+          </a:prstGeom>
+          <a:solidFill>
+            <a:srgbClr val="5D1D2E"/>
+          </a:solidFill>
+          <a:ln/>
+        </p:spPr>
+        <p:txBody>
+          <a:bodyPr wrap="square" rtlCol="0" anchor="ctr"/>
+          <a:lstStyle/>
+          <a:p>
+            <a:pPr indent="0" marL="0">
+              <a:buNone/>
+            </a:pPr>
+            <a:endParaRPr lang="en-US" dirty="0"/>
+          </a:p>
+        </p:txBody>
+      </p:sp>
+      <p:sp>
+        <p:nvSpPr>
+          <p:cNvPr id="3" name="Text 1"/>
+          <p:cNvSpPr/>
+          <p:nvPr/>
+        </p:nvSpPr>
+        <p:spPr>
+          <a:xfrm>
+            <a:off x="406301" y="457051"/>
+            <a:ext cx="8498026" cy="274290"/>
+          </a:xfrm>
+          <a:prstGeom prst="rect">
+            <a:avLst/>
+          </a:prstGeom>
+          <a:noFill/>
+          <a:ln/>
+        </p:spPr>
+        <p:txBody>
+          <a:bodyPr wrap="square" lIns="0" tIns="0" rIns="0" bIns="0" rtlCol="0" anchor="t"/>
+          <a:lstStyle/>
+          <a:p>
+            <a:pPr algn="l" indent="0" marL="0">
+              <a:lnSpc>
+                <a:spcPts val="2160"/>
+              </a:lnSpc>
+              <a:spcBef>
+                <a:spcPts val="600"/>
+              </a:spcBef>
+              <a:spcAft>
+                <a:spcPts val="800"/>
+              </a:spcAft>
+              <a:buNone/>
+            </a:pPr>
+            <a:r>
+              <a:rPr lang="en-US" sz="1800" b="1" dirty="0">
+                <a:solidFill>
+                  <a:srgbClr val="997929"/>
+                </a:solidFill>
+                <a:latin typeface="Times New Roman" pitchFamily="34" charset="0"/>
+                <a:ea typeface="Times New Roman" pitchFamily="34" charset="-122"/>
+                <a:cs typeface="Times New Roman" pitchFamily="34" charset="-120"/>
+              </a:rPr>
+              <a:t>Teacher notes</a:t>
+            </a:r>
+            <a:endParaRPr lang="en-US" sz="1800" dirty="0"/>
+          </a:p>
+        </p:txBody>
+      </p:sp>
+      <p:sp>
+        <p:nvSpPr>
+          <p:cNvPr id="4" name="Text 2"/>
+          <p:cNvSpPr/>
+          <p:nvPr/>
+        </p:nvSpPr>
+        <p:spPr>
+          <a:xfrm>
+            <a:off x="634901" y="883593"/>
+            <a:ext cx="8102798" cy="525661"/>
+          </a:xfrm>
+          <a:prstGeom prst="rect">
+            <a:avLst/>
+          </a:prstGeom>
+          <a:noFill/>
+          <a:ln/>
+        </p:spPr>
+        <p:txBody>
+          <a:bodyPr wrap="square" lIns="0" tIns="0" rIns="0" bIns="0" rtlCol="0" anchor="t"/>
+          <a:lstStyle/>
+          <a:p>
+            <a:pPr algn="l" marL="342900" indent="-342900">
+              <a:lnSpc>
+                <a:spcPts val="1620"/>
+              </a:lnSpc>
+              <a:spcAft>
+                <a:spcPts val="300"/>
+              </a:spcAft>
+              <a:buSzPct val="100000"/>
+              <a:buChar char="•"/>
+            </a:pPr>
+            <a:r>
+              <a:rPr lang="en-US" sz="1200" dirty="0">
+                <a:solidFill>
+                  <a:srgbClr val="1A1A1A"/>
+                </a:solidFill>
+                <a:latin typeface="Georgia" pitchFamily="34" charset="0"/>
+                <a:ea typeface="Georgia" pitchFamily="34" charset="-122"/>
+                <a:cs typeface="Georgia" pitchFamily="34" charset="-120"/>
+              </a:rPr>
+              <a:t>Many students think Ayurveda = herbal teas. The 8-branches list is a corrective.</a:t>
+            </a:r>
+            <a:endParaRPr lang="en-US" sz="1200" dirty="0"/>
+          </a:p>
+          <a:p>
+            <a:pPr algn="l" marL="342900" indent="-342900">
+              <a:lnSpc>
+                <a:spcPts val="1620"/>
+              </a:lnSpc>
+              <a:spcAft>
+                <a:spcPts val="300"/>
+              </a:spcAft>
+              <a:buSzPct val="100000"/>
+              <a:buChar char="•"/>
+            </a:pPr>
+            <a:r>
+              <a:rPr lang="en-US" sz="1200" dirty="0">
+                <a:solidFill>
+                  <a:srgbClr val="1A1A1A"/>
+                </a:solidFill>
+                <a:latin typeface="Georgia" pitchFamily="34" charset="0"/>
+                <a:ea typeface="Georgia" pitchFamily="34" charset="-122"/>
+                <a:cs typeface="Georgia" pitchFamily="34" charset="-120"/>
+              </a:rPr>
+              <a:t>The Suśruta-surgery point ties to Module 1; reinforces continuity.</a:t>
+            </a:r>
+            <a:endParaRPr lang="en-US" sz="1200" dirty="0"/>
+          </a:p>
+        </p:txBody>
+      </p:sp>
+      <p:sp>
+        <p:nvSpPr>
+          <p:cNvPr id="5" name="Text 3"/>
+          <p:cNvSpPr/>
+          <p:nvPr/>
+        </p:nvSpPr>
+        <p:spPr>
+          <a:xfrm>
+            <a:off x="406301" y="4434929"/>
+            <a:ext cx="8498026" cy="213271"/>
+          </a:xfrm>
+          <a:prstGeom prst="rect">
+            <a:avLst/>
+          </a:prstGeom>
+          <a:noFill/>
+          <a:ln/>
+        </p:spPr>
+        <p:txBody>
+          <a:bodyPr wrap="square" lIns="0" tIns="0" rIns="0" bIns="0" rtlCol="0" anchor="t"/>
+          <a:lstStyle/>
+          <a:p>
+            <a:pPr algn="l" indent="0" marL="0">
+              <a:lnSpc>
+                <a:spcPts val="1680"/>
+              </a:lnSpc>
+              <a:spcBef>
+                <a:spcPts val="300"/>
+              </a:spcBef>
+              <a:spcAft>
+                <a:spcPts val="300"/>
+              </a:spcAft>
+              <a:buNone/>
+            </a:pPr>
+            <a:r>
+              <a:rPr lang="en-US" sz="1200" dirty="0">
+                <a:solidFill>
+                  <a:srgbClr val="1A1A1A"/>
+                </a:solidFill>
+                <a:latin typeface="Georgia" pitchFamily="34" charset="0"/>
+                <a:ea typeface="Georgia" pitchFamily="34" charset="-122"/>
+                <a:cs typeface="Georgia" pitchFamily="34" charset="-120"/>
+              </a:rPr>
+              <a:t>Senior ·  · IKS Curriculum</a:t>
+            </a:r>
+            <a:endParaRPr lang="en-US" sz="1200" dirty="0"/>
+          </a:p>
+        </p:txBody>
+      </p:sp>
+    </p:spTree>
+  </p:cSld>
+  <p:clrMapOvr>
+    <a:masterClrMapping/>
+  </p:clrMapOvr>
+</p:sld>
+</file>
+
+<file path=ppt/slides/slide15.xml><?xml version="1.0" encoding="utf-8"?>
+<p:sld xmlns:a="http://schemas.openxmlformats.org/drawingml/2006/main" xmlns:r="http://schemas.openxmlformats.org/officeDocument/2006/relationships" xmlns:p="http://schemas.openxmlformats.org/presentationml/2006/main">
+  <p:cSld name="Slide 15">
+    <p:bg>
+      <p:bgPr>
+        <a:solidFill>
+          <a:srgbClr val="FAF7F2"/>
+        </a:solidFill>
+      </p:bgPr>
+    </p:bg>
+    <p:spTree>
+      <p:nvGrpSpPr>
+        <p:cNvPr id="1" name=""/>
+        <p:cNvGrpSpPr/>
+        <p:nvPr/>
+      </p:nvGrpSpPr>
+      <p:grpSpPr>
+        <a:xfrm>
+          <a:off x="0" y="0"/>
+          <a:ext cx="0" cy="0"/>
+          <a:chOff x="0" y="0"/>
+          <a:chExt cx="0" cy="0"/>
+        </a:xfrm>
+      </p:grpSpPr>
+      <p:sp>
+        <p:nvSpPr>
+          <p:cNvPr id="2" name="Text 0"/>
+          <p:cNvSpPr/>
+          <p:nvPr/>
+        </p:nvSpPr>
+        <p:spPr>
+          <a:xfrm>
+            <a:off x="0" y="0"/>
+            <a:ext cx="9144000" cy="101501"/>
+          </a:xfrm>
+          <a:prstGeom prst="rect">
+            <a:avLst/>
+          </a:prstGeom>
+          <a:solidFill>
+            <a:srgbClr val="5D1D2E"/>
+          </a:solidFill>
+          <a:ln/>
+        </p:spPr>
+        <p:txBody>
+          <a:bodyPr wrap="square" rtlCol="0" anchor="ctr"/>
+          <a:lstStyle/>
+          <a:p>
+            <a:pPr indent="0" marL="0">
+              <a:buNone/>
+            </a:pPr>
+            <a:endParaRPr lang="en-US" dirty="0"/>
+          </a:p>
+        </p:txBody>
+      </p:sp>
+      <p:sp>
+        <p:nvSpPr>
+          <p:cNvPr id="3" name="Text 1"/>
+          <p:cNvSpPr/>
+          <p:nvPr/>
+        </p:nvSpPr>
+        <p:spPr>
+          <a:xfrm>
+            <a:off x="406301" y="457051"/>
+            <a:ext cx="8498026" cy="274290"/>
+          </a:xfrm>
+          <a:prstGeom prst="rect">
+            <a:avLst/>
+          </a:prstGeom>
+          <a:noFill/>
+          <a:ln/>
+        </p:spPr>
+        <p:txBody>
+          <a:bodyPr wrap="square" lIns="0" tIns="0" rIns="0" bIns="0" rtlCol="0" anchor="t"/>
+          <a:lstStyle/>
+          <a:p>
+            <a:pPr algn="l" indent="0" marL="0">
+              <a:lnSpc>
+                <a:spcPts val="2160"/>
+              </a:lnSpc>
+              <a:spcBef>
+                <a:spcPts val="600"/>
+              </a:spcBef>
+              <a:spcAft>
+                <a:spcPts val="800"/>
+              </a:spcAft>
+              <a:buNone/>
+            </a:pPr>
+            <a:r>
+              <a:rPr lang="en-US" sz="1800" b="1" dirty="0">
+                <a:solidFill>
+                  <a:srgbClr val="997929"/>
+                </a:solidFill>
+                <a:latin typeface="Times New Roman" pitchFamily="34" charset="0"/>
+                <a:ea typeface="Times New Roman" pitchFamily="34" charset="-122"/>
+                <a:cs typeface="Times New Roman" pitchFamily="34" charset="-120"/>
+              </a:rPr>
+              <a:t>Citation(s) used</a:t>
+            </a:r>
+            <a:endParaRPr lang="en-US" sz="1800" dirty="0"/>
+          </a:p>
+        </p:txBody>
+      </p:sp>
+      <p:sp>
+        <p:nvSpPr>
+          <p:cNvPr id="4" name="Text 2"/>
+          <p:cNvSpPr/>
+          <p:nvPr/>
+        </p:nvSpPr>
+        <p:spPr>
+          <a:xfrm>
+            <a:off x="634901" y="883593"/>
+            <a:ext cx="8102798" cy="525661"/>
+          </a:xfrm>
+          <a:prstGeom prst="rect">
+            <a:avLst/>
+          </a:prstGeom>
+          <a:noFill/>
+          <a:ln/>
+        </p:spPr>
+        <p:txBody>
+          <a:bodyPr wrap="square" lIns="0" tIns="0" rIns="0" bIns="0" rtlCol="0" anchor="t"/>
+          <a:lstStyle/>
+          <a:p>
+            <a:pPr algn="l" marL="342900" indent="-342900">
+              <a:lnSpc>
+                <a:spcPts val="1620"/>
+              </a:lnSpc>
+              <a:spcAft>
+                <a:spcPts val="300"/>
+              </a:spcAft>
+              <a:buSzPct val="100000"/>
+              <a:buChar char="•"/>
+            </a:pPr>
+            <a:r>
+              <a:rPr lang="en-US" sz="1200" dirty="0">
+                <a:solidFill>
+                  <a:srgbClr val="1A1A1A"/>
+                </a:solidFill>
+                <a:latin typeface="Georgia" pitchFamily="34" charset="0"/>
+                <a:ea typeface="Georgia" pitchFamily="34" charset="-122"/>
+                <a:cs typeface="Georgia" pitchFamily="34" charset="-120"/>
+              </a:rPr>
+              <a:t>Wujastyk (2003), introduction.</a:t>
+            </a:r>
+            <a:endParaRPr lang="en-US" sz="1200" dirty="0"/>
+          </a:p>
+          <a:p>
+            <a:pPr algn="l" marL="342900" indent="-342900">
+              <a:lnSpc>
+                <a:spcPts val="1620"/>
+              </a:lnSpc>
+              <a:spcAft>
+                <a:spcPts val="300"/>
+              </a:spcAft>
+              <a:buSzPct val="100000"/>
+              <a:buChar char="•"/>
+            </a:pPr>
+            <a:r>
+              <a:rPr lang="en-US" sz="1200" dirty="0">
+                <a:solidFill>
+                  <a:srgbClr val="1A1A1A"/>
+                </a:solidFill>
+                <a:latin typeface="Georgia" pitchFamily="34" charset="0"/>
+                <a:ea typeface="Georgia" pitchFamily="34" charset="-122"/>
+                <a:cs typeface="Georgia" pitchFamily="34" charset="-120"/>
+              </a:rPr>
+              <a:t>Caraka Saṃhitā Sūtra-sthāna ch. 1 — Sharma (1981).</a:t>
+            </a:r>
+            <a:endParaRPr lang="en-US" sz="1200" dirty="0"/>
+          </a:p>
+        </p:txBody>
+      </p:sp>
+      <p:sp>
+        <p:nvSpPr>
+          <p:cNvPr id="5" name="Text 3"/>
           <p:cNvSpPr/>
           <p:nvPr/>
         </p:nvSpPr>
@@ -2027,7 +3865,7 @@
                 <a:ea typeface="Times New Roman" pitchFamily="34" charset="-122"/>
                 <a:cs typeface="Times New Roman" pitchFamily="34" charset="-120"/>
               </a:rPr>
-              <a:t>Materials</a:t>
+              <a:t>Learning objective</a:t>
             </a:r>
             <a:endParaRPr lang="en-US" sz="1800" dirty="0"/>
           </a:p>
@@ -2075,7 +3913,7 @@
                 <a:ea typeface="Georgia" pitchFamily="34" charset="-122"/>
                 <a:cs typeface="Georgia" pitchFamily="34" charset="-120"/>
               </a:rPr>
-              <a:t>– Whiteboard – Reference card with the 8 branches</a:t>
+              <a:t>Students locate Ayurveda within the IKS map and name the 8 branches and 3 foundational texts.</a:t>
             </a:r>
             <a:endParaRPr lang="en-US" sz="1200" dirty="0"/>
           </a:p>
@@ -2233,7 +4071,7 @@
                 <a:ea typeface="Times New Roman" pitchFamily="34" charset="-122"/>
                 <a:cs typeface="Times New Roman" pitchFamily="34" charset="-120"/>
               </a:rPr>
-              <a:t>Flow</a:t>
+              <a:t>Materials</a:t>
             </a:r>
             <a:endParaRPr lang="en-US" sz="1800" dirty="0"/>
           </a:p>
@@ -2242,6 +4080,76 @@
       <p:sp>
         <p:nvSpPr>
           <p:cNvPr id="4" name="Text 2"/>
+          <p:cNvSpPr/>
+          <p:nvPr/>
+        </p:nvSpPr>
+        <p:spPr>
+          <a:xfrm>
+            <a:off x="634901" y="883593"/>
+            <a:ext cx="8102798" cy="525661"/>
+          </a:xfrm>
+          <a:prstGeom prst="rect">
+            <a:avLst/>
+          </a:prstGeom>
+          <a:noFill/>
+          <a:ln/>
+        </p:spPr>
+        <p:txBody>
+          <a:bodyPr wrap="square" lIns="0" tIns="0" rIns="0" bIns="0" rtlCol="0" anchor="t"/>
+          <a:lstStyle/>
+          <a:p>
+            <a:pPr algn="l" marL="342900" indent="-342900">
+              <a:lnSpc>
+                <a:spcPts val="1620"/>
+              </a:lnSpc>
+              <a:spcAft>
+                <a:spcPts val="300"/>
+              </a:spcAft>
+              <a:buSzPct val="100000"/>
+              <a:buChar char="•"/>
+            </a:pPr>
+            <a:r>
+              <a:rPr lang="en-US" sz="1200" dirty="0">
+                <a:solidFill>
+                  <a:srgbClr val="1A1A1A"/>
+                </a:solidFill>
+                <a:latin typeface="Georgia" pitchFamily="34" charset="0"/>
+                <a:ea typeface="Georgia" pitchFamily="34" charset="-122"/>
+                <a:cs typeface="Georgia" pitchFamily="34" charset="-120"/>
+              </a:rPr>
+              <a:t>Whiteboard</a:t>
+            </a:r>
+            <a:endParaRPr lang="en-US" sz="1200" dirty="0"/>
+          </a:p>
+          <a:p>
+            <a:pPr algn="l" marL="342900" indent="-342900">
+              <a:lnSpc>
+                <a:spcPts val="1620"/>
+              </a:lnSpc>
+              <a:spcAft>
+                <a:spcPts val="300"/>
+              </a:spcAft>
+              <a:buSzPct val="100000"/>
+              <a:buChar char="•"/>
+            </a:pPr>
+            <a:r>
+              <a:rPr lang="en-US" sz="1200" dirty="0">
+                <a:solidFill>
+                  <a:srgbClr val="1A1A1A"/>
+                </a:solidFill>
+                <a:latin typeface="Georgia" pitchFamily="34" charset="0"/>
+                <a:ea typeface="Georgia" pitchFamily="34" charset="-122"/>
+                <a:cs typeface="Georgia" pitchFamily="34" charset="-120"/>
+              </a:rPr>
+              <a:t>Reference card with the 8 branches</a:t>
+            </a:r>
+            <a:endParaRPr lang="en-US" sz="1200" dirty="0"/>
+          </a:p>
+        </p:txBody>
+      </p:sp>
+      <p:sp>
+        <p:nvSpPr>
+          <p:cNvPr id="5" name="Text 3"/>
           <p:cNvSpPr/>
           <p:nvPr/>
         </p:nvSpPr>
@@ -2391,7 +4299,7 @@
                 <a:ea typeface="Times New Roman" pitchFamily="34" charset="-122"/>
                 <a:cs typeface="Times New Roman" pitchFamily="34" charset="-120"/>
               </a:rPr>
-              <a:t>Warm-up (5 min)</a:t>
+              <a:t>Flow</a:t>
             </a:r>
             <a:endParaRPr lang="en-US" sz="1800" dirty="0"/>
           </a:p>
@@ -2400,125 +4308,6 @@
       <p:sp>
         <p:nvSpPr>
           <p:cNvPr id="4" name="Text 2"/>
-          <p:cNvSpPr/>
-          <p:nvPr/>
-        </p:nvSpPr>
-        <p:spPr>
-          <a:xfrm>
-            <a:off x="406301" y="870942"/>
-            <a:ext cx="8498026" cy="213271"/>
-          </a:xfrm>
-          <a:prstGeom prst="rect">
-            <a:avLst/>
-          </a:prstGeom>
-          <a:noFill/>
-          <a:ln/>
-        </p:spPr>
-        <p:txBody>
-          <a:bodyPr wrap="square" lIns="0" tIns="0" rIns="0" bIns="0" rtlCol="0" anchor="t"/>
-          <a:lstStyle/>
-          <a:p>
-            <a:pPr algn="l" indent="0" marL="0">
-              <a:lnSpc>
-                <a:spcPts val="1680"/>
-              </a:lnSpc>
-              <a:spcBef>
-                <a:spcPts val="300"/>
-              </a:spcBef>
-              <a:spcAft>
-                <a:spcPts val="300"/>
-              </a:spcAft>
-              <a:buNone/>
-            </a:pPr>
-            <a:r>
-              <a:rPr lang="en-US" sz="1200" dirty="0">
-                <a:solidFill>
-                  <a:srgbClr val="1A1A1A"/>
-                </a:solidFill>
-                <a:latin typeface="Georgia" pitchFamily="34" charset="0"/>
-                <a:ea typeface="Georgia" pitchFamily="34" charset="-122"/>
-                <a:cs typeface="Georgia" pitchFamily="34" charset="-120"/>
-              </a:rPr>
-              <a:t>Provocation: </a:t>
-            </a:r>
-            <a:pPr algn="l" indent="0" marL="0">
-              <a:lnSpc>
-                <a:spcPts val="1680"/>
-              </a:lnSpc>
-              <a:spcBef>
-                <a:spcPts val="300"/>
-              </a:spcBef>
-              <a:spcAft>
-                <a:spcPts val="300"/>
-              </a:spcAft>
-              <a:buNone/>
-            </a:pPr>
-            <a:r>
-              <a:rPr lang="en-US" sz="1200" i="1" dirty="0">
-                <a:solidFill>
-                  <a:srgbClr val="1A1A1A"/>
-                </a:solidFill>
-                <a:latin typeface="Georgia" pitchFamily="34" charset="0"/>
-                <a:ea typeface="Georgia" pitchFamily="34" charset="-122"/>
-                <a:cs typeface="Georgia" pitchFamily="34" charset="-120"/>
-              </a:rPr>
-              <a:t>"In what way is Ayurveda 'science'? In what way is it not?"</a:t>
-            </a:r>
-            <a:endParaRPr lang="en-US" sz="1200" dirty="0"/>
-          </a:p>
-        </p:txBody>
-      </p:sp>
-      <p:sp>
-        <p:nvSpPr>
-          <p:cNvPr id="5" name="Text 3"/>
-          <p:cNvSpPr/>
-          <p:nvPr/>
-        </p:nvSpPr>
-        <p:spPr>
-          <a:xfrm>
-            <a:off x="406301" y="1160413"/>
-            <a:ext cx="8498026" cy="213271"/>
-          </a:xfrm>
-          <a:prstGeom prst="rect">
-            <a:avLst/>
-          </a:prstGeom>
-          <a:noFill/>
-          <a:ln/>
-        </p:spPr>
-        <p:txBody>
-          <a:bodyPr wrap="square" lIns="0" tIns="0" rIns="0" bIns="0" rtlCol="0" anchor="t"/>
-          <a:lstStyle/>
-          <a:p>
-            <a:pPr algn="l" indent="0" marL="0">
-              <a:lnSpc>
-                <a:spcPts val="1680"/>
-              </a:lnSpc>
-              <a:spcBef>
-                <a:spcPts val="300"/>
-              </a:spcBef>
-              <a:spcAft>
-                <a:spcPts val="300"/>
-              </a:spcAft>
-              <a:buNone/>
-            </a:pPr>
-            <a:r>
-              <a:rPr lang="en-US" sz="1200" dirty="0">
-                <a:solidFill>
-                  <a:srgbClr val="1A1A1A"/>
-                </a:solidFill>
-                <a:latin typeface="Georgia" pitchFamily="34" charset="0"/>
-                <a:ea typeface="Georgia" pitchFamily="34" charset="-122"/>
-                <a:cs typeface="Georgia" pitchFamily="34" charset="-120"/>
-              </a:rPr>
-              <a:t>Take 3 student answers.</a:t>
-            </a:r>
-            <a:endParaRPr lang="en-US" sz="1200" dirty="0"/>
-          </a:p>
-        </p:txBody>
-      </p:sp>
-      <p:sp>
-        <p:nvSpPr>
-          <p:cNvPr id="6" name="Text 4"/>
           <p:cNvSpPr/>
           <p:nvPr/>
         </p:nvSpPr>
@@ -2668,7 +4457,7 @@
                 <a:ea typeface="Times New Roman" pitchFamily="34" charset="-122"/>
                 <a:cs typeface="Times New Roman" pitchFamily="34" charset="-120"/>
               </a:rPr>
-              <a:t>Discussion (10 min)</a:t>
+              <a:t>Warm-up (5 min)</a:t>
             </a:r>
             <a:endParaRPr lang="en-US" sz="1800" dirty="0"/>
           </a:p>
@@ -2716,7 +4505,30 @@
                 <a:ea typeface="Georgia" pitchFamily="34" charset="-122"/>
                 <a:cs typeface="Georgia" pitchFamily="34" charset="-120"/>
               </a:rPr>
-              <a:t>– Which branch surprised you most? – Where does Ayurveda overlap with modern medicine cleanly?</a:t>
+              <a:t>Provocation: </a:t>
+            </a:r>
+            <a:pPr algn="l" indent="0" marL="0">
+              <a:lnSpc>
+                <a:spcPts val="1680"/>
+              </a:lnSpc>
+              <a:spcBef>
+                <a:spcPts val="300"/>
+              </a:spcBef>
+              <a:spcAft>
+                <a:spcPts val="300"/>
+              </a:spcAft>
+              <a:buNone/>
+            </a:pPr>
+            <a:r>
+              <a:rPr lang="en-US" sz="1200" i="1" dirty="0">
+                <a:solidFill>
+                  <a:srgbClr val="1A1A1A"/>
+                </a:solidFill>
+                <a:latin typeface="Georgia" pitchFamily="34" charset="0"/>
+                <a:ea typeface="Georgia" pitchFamily="34" charset="-122"/>
+                <a:cs typeface="Georgia" pitchFamily="34" charset="-120"/>
+              </a:rPr>
+              <a:t>"In what way is Ayurveda 'science'? In what way is it not?"</a:t>
             </a:r>
             <a:endParaRPr lang="en-US" sz="1200" dirty="0"/>
           </a:p>
@@ -2725,6 +4537,54 @@
       <p:sp>
         <p:nvSpPr>
           <p:cNvPr id="5" name="Text 3"/>
+          <p:cNvSpPr/>
+          <p:nvPr/>
+        </p:nvSpPr>
+        <p:spPr>
+          <a:xfrm>
+            <a:off x="406301" y="1160413"/>
+            <a:ext cx="8498026" cy="213271"/>
+          </a:xfrm>
+          <a:prstGeom prst="rect">
+            <a:avLst/>
+          </a:prstGeom>
+          <a:noFill/>
+          <a:ln/>
+        </p:spPr>
+        <p:txBody>
+          <a:bodyPr wrap="square" lIns="0" tIns="0" rIns="0" bIns="0" rtlCol="0" anchor="t"/>
+          <a:lstStyle/>
+          <a:p>
+            <a:pPr algn="l" indent="0" marL="0">
+              <a:lnSpc>
+                <a:spcPts val="1680"/>
+              </a:lnSpc>
+              <a:spcBef>
+                <a:spcPts val="300"/>
+              </a:spcBef>
+              <a:spcAft>
+                <a:spcPts val="300"/>
+              </a:spcAft>
+              <a:buNone/>
+            </a:pPr>
+            <a:r>
+              <a:rPr lang="en-US" sz="1200" dirty="0">
+                <a:solidFill>
+                  <a:srgbClr val="1A1A1A"/>
+                </a:solidFill>
+                <a:latin typeface="Georgia" pitchFamily="34" charset="0"/>
+                <a:ea typeface="Georgia" pitchFamily="34" charset="-122"/>
+                <a:cs typeface="Georgia" pitchFamily="34" charset="-120"/>
+              </a:rPr>
+              <a:t>Take 3 student answers.</a:t>
+            </a:r>
+            <a:endParaRPr lang="en-US" sz="1200" dirty="0"/>
+          </a:p>
+        </p:txBody>
+      </p:sp>
+      <p:sp>
+        <p:nvSpPr>
+          <p:cNvPr id="6" name="Text 4"/>
           <p:cNvSpPr/>
           <p:nvPr/>
         </p:nvSpPr>
@@ -2874,7 +4734,7 @@
                 <a:ea typeface="Times New Roman" pitchFamily="34" charset="-122"/>
                 <a:cs typeface="Times New Roman" pitchFamily="34" charset="-120"/>
               </a:rPr>
-              <a:t>Wrap-up (5 min)</a:t>
+              <a:t>Core (25 min)</a:t>
             </a:r>
             <a:endParaRPr lang="en-US" sz="1800" dirty="0"/>
           </a:p>
@@ -2888,8 +4748,8 @@
         </p:nvSpPr>
         <p:spPr>
           <a:xfrm>
-            <a:off x="406301" y="870942"/>
-            <a:ext cx="8498026" cy="213271"/>
+            <a:off x="634901" y="883593"/>
+            <a:ext cx="8102798" cy="487561"/>
           </a:xfrm>
           <a:prstGeom prst="rect">
             <a:avLst/>
@@ -2901,8 +4761,200 @@
           <a:bodyPr wrap="square" lIns="0" tIns="0" rIns="0" bIns="0" rtlCol="0" anchor="t"/>
           <a:lstStyle/>
           <a:p>
+            <a:pPr algn="l" marL="342900" indent="-342900">
+              <a:lnSpc>
+                <a:spcPts val="1620"/>
+              </a:lnSpc>
+              <a:spcAft>
+                <a:spcPts val="300"/>
+              </a:spcAft>
+              <a:buSzPct val="100000"/>
+              <a:buChar char="•"/>
+            </a:pPr>
+            <a:r>
+              <a:rPr lang="en-US" sz="1200" b="1" dirty="0">
+                <a:solidFill>
+                  <a:srgbClr val="1A1A1A"/>
+                </a:solidFill>
+                <a:latin typeface="Georgia" pitchFamily="34" charset="0"/>
+                <a:ea typeface="Georgia" pitchFamily="34" charset="-122"/>
+                <a:cs typeface="Georgia" pitchFamily="34" charset="-120"/>
+              </a:rPr>
+              <a:t>Ayurveda's place.</a:t>
+            </a:r>
             <a:pPr algn="l" indent="0" marL="0">
               <a:lnSpc>
+                <a:spcPts val="1620"/>
+              </a:lnSpc>
+              <a:spcAft>
+                <a:spcPts val="300"/>
+              </a:spcAft>
+              <a:buNone/>
+            </a:pPr>
+            <a:r>
+              <a:rPr lang="en-US" sz="1200" dirty="0">
+                <a:solidFill>
+                  <a:srgbClr val="1A1A1A"/>
+                </a:solidFill>
+                <a:latin typeface="Georgia" pitchFamily="34" charset="0"/>
+                <a:ea typeface="Georgia" pitchFamily="34" charset="-122"/>
+                <a:cs typeface="Georgia" pitchFamily="34" charset="-120"/>
+              </a:rPr>
+              <a:t> Ayurveda is an </a:t>
+            </a:r>
+            <a:pPr algn="l" indent="0" marL="0">
+              <a:lnSpc>
+                <a:spcPts val="1620"/>
+              </a:lnSpc>
+              <a:spcAft>
+                <a:spcPts val="300"/>
+              </a:spcAft>
+              <a:buNone/>
+            </a:pPr>
+            <a:r>
+              <a:rPr lang="en-US" sz="1200" b="1" dirty="0">
+                <a:solidFill>
+                  <a:srgbClr val="1A1A1A"/>
+                </a:solidFill>
+                <a:latin typeface="Georgia" pitchFamily="34" charset="0"/>
+                <a:ea typeface="Georgia" pitchFamily="34" charset="-122"/>
+                <a:cs typeface="Georgia" pitchFamily="34" charset="-120"/>
+              </a:rPr>
+              <a:t>Upaveda</a:t>
+            </a:r>
+            <a:pPr algn="l" indent="0" marL="0">
+              <a:lnSpc>
+                <a:spcPts val="1620"/>
+              </a:lnSpc>
+              <a:spcAft>
+                <a:spcPts val="300"/>
+              </a:spcAft>
+              <a:buNone/>
+            </a:pPr>
+            <a:r>
+              <a:rPr lang="en-US" sz="1200" dirty="0">
+                <a:solidFill>
+                  <a:srgbClr val="1A1A1A"/>
+                </a:solidFill>
+                <a:latin typeface="Georgia" pitchFamily="34" charset="0"/>
+                <a:ea typeface="Georgia" pitchFamily="34" charset="-122"/>
+                <a:cs typeface="Georgia" pitchFamily="34" charset="-120"/>
+              </a:rPr>
+              <a:t> — a "subordinate Veda." Specifically, it's traditionally an Upaveda of the </a:t>
+            </a:r>
+            <a:pPr algn="l" indent="0" marL="0">
+              <a:lnSpc>
+                <a:spcPts val="1620"/>
+              </a:lnSpc>
+              <a:spcAft>
+                <a:spcPts val="300"/>
+              </a:spcAft>
+              <a:buNone/>
+            </a:pPr>
+            <a:r>
+              <a:rPr lang="en-US" sz="1200" b="1" dirty="0">
+                <a:solidFill>
+                  <a:srgbClr val="1A1A1A"/>
+                </a:solidFill>
+                <a:latin typeface="Georgia" pitchFamily="34" charset="0"/>
+                <a:ea typeface="Georgia" pitchFamily="34" charset="-122"/>
+                <a:cs typeface="Georgia" pitchFamily="34" charset="-120"/>
+              </a:rPr>
+              <a:t>Atharva Veda</a:t>
+            </a:r>
+            <a:pPr algn="l" indent="0" marL="0">
+              <a:lnSpc>
+                <a:spcPts val="1620"/>
+              </a:lnSpc>
+              <a:spcAft>
+                <a:spcPts val="300"/>
+              </a:spcAft>
+              <a:buNone/>
+            </a:pPr>
+            <a:r>
+              <a:rPr lang="en-US" sz="1200" dirty="0">
+                <a:solidFill>
+                  <a:srgbClr val="1A1A1A"/>
+                </a:solidFill>
+                <a:latin typeface="Georgia" pitchFamily="34" charset="0"/>
+                <a:ea typeface="Georgia" pitchFamily="34" charset="-122"/>
+                <a:cs typeface="Georgia" pitchFamily="34" charset="-120"/>
+              </a:rPr>
+              <a:t> (which contained early medical material).</a:t>
+            </a:r>
+            <a:endParaRPr lang="en-US" sz="1200" dirty="0"/>
+          </a:p>
+        </p:txBody>
+      </p:sp>
+      <p:sp>
+        <p:nvSpPr>
+          <p:cNvPr id="5" name="Text 3"/>
+          <p:cNvSpPr/>
+          <p:nvPr/>
+        </p:nvSpPr>
+        <p:spPr>
+          <a:xfrm>
+            <a:off x="634901" y="1472654"/>
+            <a:ext cx="8102798" cy="281880"/>
+          </a:xfrm>
+          <a:prstGeom prst="rect">
+            <a:avLst/>
+          </a:prstGeom>
+          <a:noFill/>
+          <a:ln/>
+        </p:spPr>
+        <p:txBody>
+          <a:bodyPr wrap="square" lIns="0" tIns="0" rIns="0" bIns="0" rtlCol="0" anchor="t"/>
+          <a:lstStyle/>
+          <a:p>
+            <a:pPr algn="l" marL="342900" indent="-342900">
+              <a:lnSpc>
+                <a:spcPts val="1620"/>
+              </a:lnSpc>
+              <a:spcAft>
+                <a:spcPts val="300"/>
+              </a:spcAft>
+              <a:buSzPct val="100000"/>
+              <a:buChar char="•"/>
+            </a:pPr>
+            <a:r>
+              <a:rPr lang="en-US" sz="1200" b="1" dirty="0">
+                <a:solidFill>
+                  <a:srgbClr val="1A1A1A"/>
+                </a:solidFill>
+                <a:latin typeface="Georgia" pitchFamily="34" charset="0"/>
+                <a:ea typeface="Georgia" pitchFamily="34" charset="-122"/>
+                <a:cs typeface="Georgia" pitchFamily="34" charset="-120"/>
+              </a:rPr>
+              <a:t>The 8 branches (aṣṭāṅga Ayurveda):</a:t>
+            </a:r>
+            <a:endParaRPr lang="en-US" sz="1200" dirty="0"/>
+          </a:p>
+        </p:txBody>
+      </p:sp>
+      <p:sp>
+        <p:nvSpPr>
+          <p:cNvPr id="6" name="Text 4"/>
+          <p:cNvSpPr/>
+          <p:nvPr/>
+        </p:nvSpPr>
+        <p:spPr>
+          <a:xfrm>
+            <a:off x="406301" y="1843385"/>
+            <a:ext cx="8498026" cy="213271"/>
+          </a:xfrm>
+          <a:prstGeom prst="rect">
+            <a:avLst/>
+          </a:prstGeom>
+          <a:noFill/>
+          <a:ln/>
+        </p:spPr>
+        <p:txBody>
+          <a:bodyPr wrap="square" lIns="0" tIns="0" rIns="0" bIns="0" rtlCol="0" anchor="t"/>
+          <a:lstStyle/>
+          <a:p>
+            <a:pPr algn="l" indent="0" marL="0">
+              <a:lnSpc>
                 <a:spcPts val="1680"/>
               </a:lnSpc>
               <a:spcBef>
@@ -2914,29 +4966,6 @@
               <a:buNone/>
             </a:pPr>
             <a:r>
-              <a:rPr lang="en-US" sz="1200" dirty="0">
-                <a:solidFill>
-                  <a:srgbClr val="1A1A1A"/>
-                </a:solidFill>
-                <a:latin typeface="Georgia" pitchFamily="34" charset="0"/>
-                <a:ea typeface="Georgia" pitchFamily="34" charset="-122"/>
-                <a:cs typeface="Georgia" pitchFamily="34" charset="-120"/>
-              </a:rPr>
-              <a:t>– Preview Day 2: </a:t>
-            </a:r>
-            <a:pPr algn="l" indent="0" marL="0">
-              <a:lnSpc>
-                <a:spcPts val="1680"/>
-              </a:lnSpc>
-              <a:spcBef>
-                <a:spcPts val="300"/>
-              </a:spcBef>
-              <a:spcAft>
-                <a:spcPts val="300"/>
-              </a:spcAft>
-              <a:buNone/>
-            </a:pPr>
-            <a:r>
               <a:rPr lang="en-US" sz="1200" i="1" dirty="0">
                 <a:solidFill>
                   <a:srgbClr val="1A1A1A"/>
@@ -2945,7 +4974,7 @@
                 <a:ea typeface="Georgia" pitchFamily="34" charset="-122"/>
                 <a:cs typeface="Georgia" pitchFamily="34" charset="-120"/>
               </a:rPr>
-              <a:t>"Tomorrow — we read Caraka Saṃhitā Sūtra-sthāna ch. 1 in IAST."</a:t>
+              <a:t>Each row: # · Sanskrit · Domain.</a:t>
             </a:r>
             <a:endParaRPr lang="en-US" sz="1200" dirty="0"/>
           </a:p>
@@ -2953,7 +4982,7 @@
       </p:sp>
       <p:sp>
         <p:nvSpPr>
-          <p:cNvPr id="5" name="Text 3"/>
+          <p:cNvPr id="7" name="Text 5"/>
           <p:cNvSpPr/>
           <p:nvPr/>
         </p:nvSpPr>
@@ -3103,7 +5132,7 @@
                 <a:ea typeface="Times New Roman" pitchFamily="34" charset="-122"/>
                 <a:cs typeface="Times New Roman" pitchFamily="34" charset="-120"/>
               </a:rPr>
-              <a:t>Differentiation</a:t>
+              <a:t>Core (25 min) (cont.)</a:t>
             </a:r>
             <a:endParaRPr lang="en-US" sz="1800" dirty="0"/>
           </a:p>
@@ -3118,7 +5147,7 @@
         <p:spPr>
           <a:xfrm>
             <a:off x="634901" y="883593"/>
-            <a:ext cx="8102798" cy="525661"/>
+            <a:ext cx="8102798" cy="1988344"/>
           </a:xfrm>
           <a:prstGeom prst="rect">
             <a:avLst/>
@@ -3149,7 +5178,7 @@
                 <a:ea typeface="Georgia" pitchFamily="34" charset="-122"/>
                 <a:cs typeface="Georgia" pitchFamily="34" charset="-120"/>
               </a:rPr>
-              <a:t>Tier up:</a:t>
+              <a:t>1</a:t>
             </a:r>
             <a:pPr algn="l" indent="0" marL="0">
               <a:lnSpc>
@@ -3169,7 +5198,7 @@
                 <a:ea typeface="Georgia" pitchFamily="34" charset="-122"/>
                 <a:cs typeface="Georgia" pitchFamily="34" charset="-120"/>
               </a:rPr>
-              <a:t> Read Wujastyk (2003) intro chapter.</a:t>
+              <a:t> — Kāya-cikitsā · Internal medicine</a:t>
             </a:r>
             <a:endParaRPr lang="en-US" sz="1200" dirty="0"/>
           </a:p>
@@ -3193,7 +5222,7 @@
                 <a:ea typeface="Georgia" pitchFamily="34" charset="-122"/>
                 <a:cs typeface="Georgia" pitchFamily="34" charset="-120"/>
               </a:rPr>
-              <a:t>Tier down:</a:t>
+              <a:t>2</a:t>
             </a:r>
             <a:pPr algn="l" indent="0" marL="0">
               <a:lnSpc>
@@ -3213,7 +5242,271 @@
                 <a:ea typeface="Georgia" pitchFamily="34" charset="-122"/>
                 <a:cs typeface="Georgia" pitchFamily="34" charset="-120"/>
               </a:rPr>
-              <a:t> Memorise the 3 foundational texts + 4 of the 8 branches.</a:t>
+              <a:t> — Bāla-cikitsā · Pediatrics</a:t>
+            </a:r>
+            <a:endParaRPr lang="en-US" sz="1200" dirty="0"/>
+          </a:p>
+          <a:p>
+            <a:pPr algn="l" marL="342900" indent="-342900">
+              <a:lnSpc>
+                <a:spcPts val="1620"/>
+              </a:lnSpc>
+              <a:spcAft>
+                <a:spcPts val="300"/>
+              </a:spcAft>
+              <a:buSzPct val="100000"/>
+              <a:buChar char="•"/>
+            </a:pPr>
+            <a:r>
+              <a:rPr lang="en-US" sz="1200" b="1" dirty="0">
+                <a:solidFill>
+                  <a:srgbClr val="1A1A1A"/>
+                </a:solidFill>
+                <a:latin typeface="Georgia" pitchFamily="34" charset="0"/>
+                <a:ea typeface="Georgia" pitchFamily="34" charset="-122"/>
+                <a:cs typeface="Georgia" pitchFamily="34" charset="-120"/>
+              </a:rPr>
+              <a:t>3</a:t>
+            </a:r>
+            <a:pPr algn="l" indent="0" marL="0">
+              <a:lnSpc>
+                <a:spcPts val="1620"/>
+              </a:lnSpc>
+              <a:spcAft>
+                <a:spcPts val="300"/>
+              </a:spcAft>
+              <a:buNone/>
+            </a:pPr>
+            <a:r>
+              <a:rPr lang="en-US" sz="1200" dirty="0">
+                <a:solidFill>
+                  <a:srgbClr val="1A1A1A"/>
+                </a:solidFill>
+                <a:latin typeface="Georgia" pitchFamily="34" charset="0"/>
+                <a:ea typeface="Georgia" pitchFamily="34" charset="-122"/>
+                <a:cs typeface="Georgia" pitchFamily="34" charset="-120"/>
+              </a:rPr>
+              <a:t> — Graha-cikitsā · "Psychiatry" / affliction medicine</a:t>
+            </a:r>
+            <a:endParaRPr lang="en-US" sz="1200" dirty="0"/>
+          </a:p>
+          <a:p>
+            <a:pPr algn="l" marL="342900" indent="-342900">
+              <a:lnSpc>
+                <a:spcPts val="1620"/>
+              </a:lnSpc>
+              <a:spcAft>
+                <a:spcPts val="300"/>
+              </a:spcAft>
+              <a:buSzPct val="100000"/>
+              <a:buChar char="•"/>
+            </a:pPr>
+            <a:r>
+              <a:rPr lang="en-US" sz="1200" b="1" dirty="0">
+                <a:solidFill>
+                  <a:srgbClr val="1A1A1A"/>
+                </a:solidFill>
+                <a:latin typeface="Georgia" pitchFamily="34" charset="0"/>
+                <a:ea typeface="Georgia" pitchFamily="34" charset="-122"/>
+                <a:cs typeface="Georgia" pitchFamily="34" charset="-120"/>
+              </a:rPr>
+              <a:t>4</a:t>
+            </a:r>
+            <a:pPr algn="l" indent="0" marL="0">
+              <a:lnSpc>
+                <a:spcPts val="1620"/>
+              </a:lnSpc>
+              <a:spcAft>
+                <a:spcPts val="300"/>
+              </a:spcAft>
+              <a:buNone/>
+            </a:pPr>
+            <a:r>
+              <a:rPr lang="en-US" sz="1200" dirty="0">
+                <a:solidFill>
+                  <a:srgbClr val="1A1A1A"/>
+                </a:solidFill>
+                <a:latin typeface="Georgia" pitchFamily="34" charset="0"/>
+                <a:ea typeface="Georgia" pitchFamily="34" charset="-122"/>
+                <a:cs typeface="Georgia" pitchFamily="34" charset="-120"/>
+              </a:rPr>
+              <a:t> — Ūrdhvāṅga-cikitsā · ENT, ophthalmology</a:t>
+            </a:r>
+            <a:endParaRPr lang="en-US" sz="1200" dirty="0"/>
+          </a:p>
+          <a:p>
+            <a:pPr algn="l" marL="342900" indent="-342900">
+              <a:lnSpc>
+                <a:spcPts val="1620"/>
+              </a:lnSpc>
+              <a:spcAft>
+                <a:spcPts val="300"/>
+              </a:spcAft>
+              <a:buSzPct val="100000"/>
+              <a:buChar char="•"/>
+            </a:pPr>
+            <a:r>
+              <a:rPr lang="en-US" sz="1200" b="1" dirty="0">
+                <a:solidFill>
+                  <a:srgbClr val="1A1A1A"/>
+                </a:solidFill>
+                <a:latin typeface="Georgia" pitchFamily="34" charset="0"/>
+                <a:ea typeface="Georgia" pitchFamily="34" charset="-122"/>
+                <a:cs typeface="Georgia" pitchFamily="34" charset="-120"/>
+              </a:rPr>
+              <a:t>5</a:t>
+            </a:r>
+            <a:pPr algn="l" indent="0" marL="0">
+              <a:lnSpc>
+                <a:spcPts val="1620"/>
+              </a:lnSpc>
+              <a:spcAft>
+                <a:spcPts val="300"/>
+              </a:spcAft>
+              <a:buNone/>
+            </a:pPr>
+            <a:r>
+              <a:rPr lang="en-US" sz="1200" dirty="0">
+                <a:solidFill>
+                  <a:srgbClr val="1A1A1A"/>
+                </a:solidFill>
+                <a:latin typeface="Georgia" pitchFamily="34" charset="0"/>
+                <a:ea typeface="Georgia" pitchFamily="34" charset="-122"/>
+                <a:cs typeface="Georgia" pitchFamily="34" charset="-120"/>
+              </a:rPr>
+              <a:t> — Śalya-tantra · Surgery</a:t>
+            </a:r>
+            <a:endParaRPr lang="en-US" sz="1200" dirty="0"/>
+          </a:p>
+          <a:p>
+            <a:pPr algn="l" marL="342900" indent="-342900">
+              <a:lnSpc>
+                <a:spcPts val="1620"/>
+              </a:lnSpc>
+              <a:spcAft>
+                <a:spcPts val="300"/>
+              </a:spcAft>
+              <a:buSzPct val="100000"/>
+              <a:buChar char="•"/>
+            </a:pPr>
+            <a:r>
+              <a:rPr lang="en-US" sz="1200" b="1" dirty="0">
+                <a:solidFill>
+                  <a:srgbClr val="1A1A1A"/>
+                </a:solidFill>
+                <a:latin typeface="Georgia" pitchFamily="34" charset="0"/>
+                <a:ea typeface="Georgia" pitchFamily="34" charset="-122"/>
+                <a:cs typeface="Georgia" pitchFamily="34" charset="-120"/>
+              </a:rPr>
+              <a:t>6</a:t>
+            </a:r>
+            <a:pPr algn="l" indent="0" marL="0">
+              <a:lnSpc>
+                <a:spcPts val="1620"/>
+              </a:lnSpc>
+              <a:spcAft>
+                <a:spcPts val="300"/>
+              </a:spcAft>
+              <a:buNone/>
+            </a:pPr>
+            <a:r>
+              <a:rPr lang="en-US" sz="1200" dirty="0">
+                <a:solidFill>
+                  <a:srgbClr val="1A1A1A"/>
+                </a:solidFill>
+                <a:latin typeface="Georgia" pitchFamily="34" charset="0"/>
+                <a:ea typeface="Georgia" pitchFamily="34" charset="-122"/>
+                <a:cs typeface="Georgia" pitchFamily="34" charset="-120"/>
+              </a:rPr>
+              <a:t> — Daṁṣṭra-cikitsā · Toxicology</a:t>
+            </a:r>
+            <a:endParaRPr lang="en-US" sz="1200" dirty="0"/>
+          </a:p>
+          <a:p>
+            <a:pPr algn="l" marL="342900" indent="-342900">
+              <a:lnSpc>
+                <a:spcPts val="1620"/>
+              </a:lnSpc>
+              <a:spcAft>
+                <a:spcPts val="300"/>
+              </a:spcAft>
+              <a:buSzPct val="100000"/>
+              <a:buChar char="•"/>
+            </a:pPr>
+            <a:r>
+              <a:rPr lang="en-US" sz="1200" b="1" dirty="0">
+                <a:solidFill>
+                  <a:srgbClr val="1A1A1A"/>
+                </a:solidFill>
+                <a:latin typeface="Georgia" pitchFamily="34" charset="0"/>
+                <a:ea typeface="Georgia" pitchFamily="34" charset="-122"/>
+                <a:cs typeface="Georgia" pitchFamily="34" charset="-120"/>
+              </a:rPr>
+              <a:t>7</a:t>
+            </a:r>
+            <a:pPr algn="l" indent="0" marL="0">
+              <a:lnSpc>
+                <a:spcPts val="1620"/>
+              </a:lnSpc>
+              <a:spcAft>
+                <a:spcPts val="300"/>
+              </a:spcAft>
+              <a:buNone/>
+            </a:pPr>
+            <a:r>
+              <a:rPr lang="en-US" sz="1200" dirty="0">
+                <a:solidFill>
+                  <a:srgbClr val="1A1A1A"/>
+                </a:solidFill>
+                <a:latin typeface="Georgia" pitchFamily="34" charset="0"/>
+                <a:ea typeface="Georgia" pitchFamily="34" charset="-122"/>
+                <a:cs typeface="Georgia" pitchFamily="34" charset="-120"/>
+              </a:rPr>
+              <a:t> — Jarā-cikitsā · Geriatrics, rejuvenation</a:t>
+            </a:r>
+            <a:endParaRPr lang="en-US" sz="1200" dirty="0"/>
+          </a:p>
+          <a:p>
+            <a:pPr algn="l" marL="342900" indent="-342900">
+              <a:lnSpc>
+                <a:spcPts val="1620"/>
+              </a:lnSpc>
+              <a:spcAft>
+                <a:spcPts val="300"/>
+              </a:spcAft>
+              <a:buSzPct val="100000"/>
+              <a:buChar char="•"/>
+            </a:pPr>
+            <a:r>
+              <a:rPr lang="en-US" sz="1200" b="1" dirty="0">
+                <a:solidFill>
+                  <a:srgbClr val="1A1A1A"/>
+                </a:solidFill>
+                <a:latin typeface="Georgia" pitchFamily="34" charset="0"/>
+                <a:ea typeface="Georgia" pitchFamily="34" charset="-122"/>
+                <a:cs typeface="Georgia" pitchFamily="34" charset="-120"/>
+              </a:rPr>
+              <a:t>8</a:t>
+            </a:r>
+            <a:pPr algn="l" indent="0" marL="0">
+              <a:lnSpc>
+                <a:spcPts val="1620"/>
+              </a:lnSpc>
+              <a:spcAft>
+                <a:spcPts val="300"/>
+              </a:spcAft>
+              <a:buNone/>
+            </a:pPr>
+            <a:r>
+              <a:rPr lang="en-US" sz="1200" dirty="0">
+                <a:solidFill>
+                  <a:srgbClr val="1A1A1A"/>
+                </a:solidFill>
+                <a:latin typeface="Georgia" pitchFamily="34" charset="0"/>
+                <a:ea typeface="Georgia" pitchFamily="34" charset="-122"/>
+                <a:cs typeface="Georgia" pitchFamily="34" charset="-120"/>
+              </a:rPr>
+              <a:t> — Vṛṣa-cikitsā · Reproductive medicine</a:t>
             </a:r>
             <a:endParaRPr lang="en-US" sz="1200" dirty="0"/>
           </a:p>
@@ -3371,7 +5664,7 @@
                 <a:ea typeface="Times New Roman" pitchFamily="34" charset="-122"/>
                 <a:cs typeface="Times New Roman" pitchFamily="34" charset="-120"/>
               </a:rPr>
-              <a:t>Teacher notes</a:t>
+              <a:t>Core (25 min) (cont.)</a:t>
             </a:r>
             <a:endParaRPr lang="en-US" sz="1800" dirty="0"/>
           </a:p>
@@ -3386,7 +5679,7 @@
         <p:spPr>
           <a:xfrm>
             <a:off x="406301" y="870942"/>
-            <a:ext cx="8498026" cy="426541"/>
+            <a:ext cx="8498026" cy="213271"/>
           </a:xfrm>
           <a:prstGeom prst="rect">
             <a:avLst/>
@@ -3419,7 +5712,53 @@
                 <a:ea typeface="Georgia" pitchFamily="34" charset="-122"/>
                 <a:cs typeface="Georgia" pitchFamily="34" charset="-120"/>
               </a:rPr>
-              <a:t>– Many students think Ayurveda = herbal teas. The 8-branches list is a corrective. – The Suśruta-surgery point ties to Module 1; reinforces continuity.</a:t>
+              <a:t>Note: this is a </a:t>
+            </a:r>
+            <a:pPr algn="l" indent="0" marL="0">
+              <a:lnSpc>
+                <a:spcPts val="1680"/>
+              </a:lnSpc>
+              <a:spcBef>
+                <a:spcPts val="300"/>
+              </a:spcBef>
+              <a:spcAft>
+                <a:spcPts val="300"/>
+              </a:spcAft>
+              <a:buNone/>
+            </a:pPr>
+            <a:r>
+              <a:rPr lang="en-US" sz="1200" i="1" dirty="0">
+                <a:solidFill>
+                  <a:srgbClr val="1A1A1A"/>
+                </a:solidFill>
+                <a:latin typeface="Georgia" pitchFamily="34" charset="0"/>
+                <a:ea typeface="Georgia" pitchFamily="34" charset="-122"/>
+                <a:cs typeface="Georgia" pitchFamily="34" charset="-120"/>
+              </a:rPr>
+              <a:t>comprehensive</a:t>
+            </a:r>
+            <a:pPr algn="l" indent="0" marL="0">
+              <a:lnSpc>
+                <a:spcPts val="1680"/>
+              </a:lnSpc>
+              <a:spcBef>
+                <a:spcPts val="300"/>
+              </a:spcBef>
+              <a:spcAft>
+                <a:spcPts val="300"/>
+              </a:spcAft>
+              <a:buNone/>
+            </a:pPr>
+            <a:r>
+              <a:rPr lang="en-US" sz="1200" dirty="0">
+                <a:solidFill>
+                  <a:srgbClr val="1A1A1A"/>
+                </a:solidFill>
+                <a:latin typeface="Georgia" pitchFamily="34" charset="0"/>
+                <a:ea typeface="Georgia" pitchFamily="34" charset="-122"/>
+                <a:cs typeface="Georgia" pitchFamily="34" charset="-120"/>
+              </a:rPr>
+              <a:t> medical framework, not just herbalism.</a:t>
             </a:r>
             <a:endParaRPr lang="en-US" sz="1200" dirty="0"/>
           </a:p>
@@ -3428,6 +5767,52 @@
       <p:sp>
         <p:nvSpPr>
           <p:cNvPr id="5" name="Text 3"/>
+          <p:cNvSpPr/>
+          <p:nvPr/>
+        </p:nvSpPr>
+        <p:spPr>
+          <a:xfrm>
+            <a:off x="634901" y="1173063"/>
+            <a:ext cx="8102798" cy="281880"/>
+          </a:xfrm>
+          <a:prstGeom prst="rect">
+            <a:avLst/>
+          </a:prstGeom>
+          <a:noFill/>
+          <a:ln/>
+        </p:spPr>
+        <p:txBody>
+          <a:bodyPr wrap="square" lIns="0" tIns="0" rIns="0" bIns="0" rtlCol="0" anchor="t"/>
+          <a:lstStyle/>
+          <a:p>
+            <a:pPr algn="l" marL="342900" indent="-342900">
+              <a:lnSpc>
+                <a:spcPts val="1620"/>
+              </a:lnSpc>
+              <a:spcAft>
+                <a:spcPts val="300"/>
+              </a:spcAft>
+              <a:buSzPct val="100000"/>
+              <a:buChar char="•"/>
+            </a:pPr>
+            <a:r>
+              <a:rPr lang="en-US" sz="1200" b="1" dirty="0">
+                <a:solidFill>
+                  <a:srgbClr val="1A1A1A"/>
+                </a:solidFill>
+                <a:latin typeface="Georgia" pitchFamily="34" charset="0"/>
+                <a:ea typeface="Georgia" pitchFamily="34" charset="-122"/>
+                <a:cs typeface="Georgia" pitchFamily="34" charset="-120"/>
+              </a:rPr>
+              <a:t>The bṛhattrayī ("great three") foundational texts:</a:t>
+            </a:r>
+            <a:endParaRPr lang="en-US" sz="1200" dirty="0"/>
+          </a:p>
+        </p:txBody>
+      </p:sp>
+      <p:sp>
+        <p:nvSpPr>
+          <p:cNvPr id="6" name="Text 4"/>
           <p:cNvSpPr/>
           <p:nvPr/>
         </p:nvSpPr>
@@ -3577,7 +5962,7 @@
                 <a:ea typeface="Times New Roman" pitchFamily="34" charset="-122"/>
                 <a:cs typeface="Times New Roman" pitchFamily="34" charset="-120"/>
               </a:rPr>
-              <a:t>Citation(s) used</a:t>
+              <a:t>Core (25 min) (cont.)</a:t>
             </a:r>
             <a:endParaRPr lang="en-US" sz="1800" dirty="0"/>
           </a:p>
@@ -3591,8 +5976,8 @@
         </p:nvSpPr>
         <p:spPr>
           <a:xfrm>
-            <a:off x="406301" y="870942"/>
-            <a:ext cx="8498026" cy="213271"/>
+            <a:off x="634901" y="883593"/>
+            <a:ext cx="8102798" cy="975122"/>
           </a:xfrm>
           <a:prstGeom prst="rect">
             <a:avLst/>
@@ -3604,13 +5989,31 @@
           <a:bodyPr wrap="square" lIns="0" tIns="0" rIns="0" bIns="0" rtlCol="0" anchor="t"/>
           <a:lstStyle/>
           <a:p>
+            <a:pPr algn="l" marL="342900" indent="-342900">
+              <a:lnSpc>
+                <a:spcPts val="1620"/>
+              </a:lnSpc>
+              <a:spcAft>
+                <a:spcPts val="300"/>
+              </a:spcAft>
+              <a:buSzPct val="100000"/>
+              <a:buChar char="•"/>
+            </a:pPr>
+            <a:r>
+              <a:rPr lang="en-US" sz="1200" b="1" dirty="0">
+                <a:solidFill>
+                  <a:srgbClr val="1A1A1A"/>
+                </a:solidFill>
+                <a:latin typeface="Georgia" pitchFamily="34" charset="0"/>
+                <a:ea typeface="Georgia" pitchFamily="34" charset="-122"/>
+                <a:cs typeface="Georgia" pitchFamily="34" charset="-120"/>
+              </a:rPr>
+              <a:t>Caraka Saṃhitā</a:t>
+            </a:r>
             <a:pPr algn="l" indent="0" marL="0">
               <a:lnSpc>
-                <a:spcPts val="1680"/>
-              </a:lnSpc>
-              <a:spcBef>
-                <a:spcPts val="300"/>
-              </a:spcBef>
+                <a:spcPts val="1620"/>
+              </a:lnSpc>
               <a:spcAft>
                 <a:spcPts val="300"/>
               </a:spcAft>
@@ -3625,7 +6028,95 @@
                 <a:ea typeface="Georgia" pitchFamily="34" charset="-122"/>
                 <a:cs typeface="Georgia" pitchFamily="34" charset="-120"/>
               </a:rPr>
-              <a:t>– Wujastyk (2003), introduction. – Caraka Saṃhitā Sūtra-sthāna ch. 1 — Sharma (1981).</a:t>
+              <a:t> (~2nd c. BCE) — internal medicine focus. Attributed to Caraka; redacted by Dṛḍhabala.</a:t>
+            </a:r>
+            <a:endParaRPr lang="en-US" sz="1200" dirty="0"/>
+          </a:p>
+          <a:p>
+            <a:pPr algn="l" marL="342900" indent="-342900">
+              <a:lnSpc>
+                <a:spcPts val="1620"/>
+              </a:lnSpc>
+              <a:spcAft>
+                <a:spcPts val="300"/>
+              </a:spcAft>
+              <a:buSzPct val="100000"/>
+              <a:buChar char="•"/>
+            </a:pPr>
+            <a:r>
+              <a:rPr lang="en-US" sz="1200" b="1" dirty="0">
+                <a:solidFill>
+                  <a:srgbClr val="1A1A1A"/>
+                </a:solidFill>
+                <a:latin typeface="Georgia" pitchFamily="34" charset="0"/>
+                <a:ea typeface="Georgia" pitchFamily="34" charset="-122"/>
+                <a:cs typeface="Georgia" pitchFamily="34" charset="-120"/>
+              </a:rPr>
+              <a:t>Suśruta Saṃhitā</a:t>
+            </a:r>
+            <a:pPr algn="l" indent="0" marL="0">
+              <a:lnSpc>
+                <a:spcPts val="1620"/>
+              </a:lnSpc>
+              <a:spcAft>
+                <a:spcPts val="300"/>
+              </a:spcAft>
+              <a:buNone/>
+            </a:pPr>
+            <a:r>
+              <a:rPr lang="en-US" sz="1200" dirty="0">
+                <a:solidFill>
+                  <a:srgbClr val="1A1A1A"/>
+                </a:solidFill>
+                <a:latin typeface="Georgia" pitchFamily="34" charset="0"/>
+                <a:ea typeface="Georgia" pitchFamily="34" charset="-122"/>
+                <a:cs typeface="Georgia" pitchFamily="34" charset="-120"/>
+              </a:rPr>
+              <a:t> (~6th c. BCE or later) — surgery focus. Suśruta is the source of the cataract-surgery and rhinoplasty procedures Module 1 covered.</a:t>
+            </a:r>
+            <a:endParaRPr lang="en-US" sz="1200" dirty="0"/>
+          </a:p>
+          <a:p>
+            <a:pPr algn="l" marL="342900" indent="-342900">
+              <a:lnSpc>
+                <a:spcPts val="1620"/>
+              </a:lnSpc>
+              <a:spcAft>
+                <a:spcPts val="300"/>
+              </a:spcAft>
+              <a:buSzPct val="100000"/>
+              <a:buChar char="•"/>
+            </a:pPr>
+            <a:r>
+              <a:rPr lang="en-US" sz="1200" b="1" dirty="0">
+                <a:solidFill>
+                  <a:srgbClr val="1A1A1A"/>
+                </a:solidFill>
+                <a:latin typeface="Georgia" pitchFamily="34" charset="0"/>
+                <a:ea typeface="Georgia" pitchFamily="34" charset="-122"/>
+                <a:cs typeface="Georgia" pitchFamily="34" charset="-120"/>
+              </a:rPr>
+              <a:t>Aṣṭāṅga Hṛdaya</a:t>
+            </a:r>
+            <a:pPr algn="l" indent="0" marL="0">
+              <a:lnSpc>
+                <a:spcPts val="1620"/>
+              </a:lnSpc>
+              <a:spcAft>
+                <a:spcPts val="300"/>
+              </a:spcAft>
+              <a:buNone/>
+            </a:pPr>
+            <a:r>
+              <a:rPr lang="en-US" sz="1200" dirty="0">
+                <a:solidFill>
+                  <a:srgbClr val="1A1A1A"/>
+                </a:solidFill>
+                <a:latin typeface="Georgia" pitchFamily="34" charset="0"/>
+                <a:ea typeface="Georgia" pitchFamily="34" charset="-122"/>
+                <a:cs typeface="Georgia" pitchFamily="34" charset="-120"/>
+              </a:rPr>
+              <a:t> (~7th c. CE) — synthesis by Vāgbhaṭa; standard classical textbook.</a:t>
             </a:r>
             <a:endParaRPr lang="en-US" sz="1200" dirty="0"/>
           </a:p>
